--- a/Phase2-Project-Proposal/Presentation/ACTUAL_FINAL_PRESENTATIONv2.pptx
+++ b/Phase2-Project-Proposal/Presentation/ACTUAL_FINAL_PRESENTATIONv2.pptx
@@ -16,7 +16,6 @@
     <p:sldId id="261" r:id="rId13"/>
     <p:sldId id="262" r:id="rId14"/>
     <p:sldId id="263" r:id="rId15"/>
-    <p:sldId id="264" r:id="rId16"/>
   </p:sldIdLst>
   <p:sldSz cx="9144000" cy="6858000"/>
   <p:notesSz cx="6858000" cy="9144000"/>
@@ -71,10 +70,10 @@
         </a:solidFill>
         <a:effectLst/>
         <a:uFillTx/>
-        <a:latin typeface="+mj-lt"/>
-        <a:ea typeface="+mj-ea"/>
-        <a:cs typeface="+mj-cs"/>
-        <a:sym typeface="Helvetica"/>
+        <a:latin typeface="+mn-lt"/>
+        <a:ea typeface="+mn-ea"/>
+        <a:cs typeface="+mn-cs"/>
+        <a:sym typeface="Calibri"/>
       </a:defRPr>
     </a:lvl1pPr>
     <a:lvl2pPr marL="0" marR="0" indent="0" algn="l" defTabSz="457200" rtl="0" fontAlgn="auto" latinLnBrk="0" hangingPunct="0">
@@ -101,10 +100,10 @@
         </a:solidFill>
         <a:effectLst/>
         <a:uFillTx/>
-        <a:latin typeface="+mj-lt"/>
-        <a:ea typeface="+mj-ea"/>
-        <a:cs typeface="+mj-cs"/>
-        <a:sym typeface="Helvetica"/>
+        <a:latin typeface="+mn-lt"/>
+        <a:ea typeface="+mn-ea"/>
+        <a:cs typeface="+mn-cs"/>
+        <a:sym typeface="Calibri"/>
       </a:defRPr>
     </a:lvl2pPr>
     <a:lvl3pPr marL="0" marR="0" indent="0" algn="l" defTabSz="457200" rtl="0" fontAlgn="auto" latinLnBrk="0" hangingPunct="0">
@@ -131,10 +130,10 @@
         </a:solidFill>
         <a:effectLst/>
         <a:uFillTx/>
-        <a:latin typeface="+mj-lt"/>
-        <a:ea typeface="+mj-ea"/>
-        <a:cs typeface="+mj-cs"/>
-        <a:sym typeface="Helvetica"/>
+        <a:latin typeface="+mn-lt"/>
+        <a:ea typeface="+mn-ea"/>
+        <a:cs typeface="+mn-cs"/>
+        <a:sym typeface="Calibri"/>
       </a:defRPr>
     </a:lvl3pPr>
     <a:lvl4pPr marL="0" marR="0" indent="0" algn="l" defTabSz="457200" rtl="0" fontAlgn="auto" latinLnBrk="0" hangingPunct="0">
@@ -161,10 +160,10 @@
         </a:solidFill>
         <a:effectLst/>
         <a:uFillTx/>
-        <a:latin typeface="+mj-lt"/>
-        <a:ea typeface="+mj-ea"/>
-        <a:cs typeface="+mj-cs"/>
-        <a:sym typeface="Helvetica"/>
+        <a:latin typeface="+mn-lt"/>
+        <a:ea typeface="+mn-ea"/>
+        <a:cs typeface="+mn-cs"/>
+        <a:sym typeface="Calibri"/>
       </a:defRPr>
     </a:lvl4pPr>
     <a:lvl5pPr marL="0" marR="0" indent="0" algn="l" defTabSz="457200" rtl="0" fontAlgn="auto" latinLnBrk="0" hangingPunct="0">
@@ -191,10 +190,10 @@
         </a:solidFill>
         <a:effectLst/>
         <a:uFillTx/>
-        <a:latin typeface="+mj-lt"/>
-        <a:ea typeface="+mj-ea"/>
-        <a:cs typeface="+mj-cs"/>
-        <a:sym typeface="Helvetica"/>
+        <a:latin typeface="+mn-lt"/>
+        <a:ea typeface="+mn-ea"/>
+        <a:cs typeface="+mn-cs"/>
+        <a:sym typeface="Calibri"/>
       </a:defRPr>
     </a:lvl5pPr>
     <a:lvl6pPr marL="0" marR="0" indent="0" algn="l" defTabSz="457200" rtl="0" fontAlgn="auto" latinLnBrk="0" hangingPunct="0">
@@ -221,10 +220,10 @@
         </a:solidFill>
         <a:effectLst/>
         <a:uFillTx/>
-        <a:latin typeface="+mj-lt"/>
-        <a:ea typeface="+mj-ea"/>
-        <a:cs typeface="+mj-cs"/>
-        <a:sym typeface="Helvetica"/>
+        <a:latin typeface="+mn-lt"/>
+        <a:ea typeface="+mn-ea"/>
+        <a:cs typeface="+mn-cs"/>
+        <a:sym typeface="Calibri"/>
       </a:defRPr>
     </a:lvl6pPr>
     <a:lvl7pPr marL="0" marR="0" indent="0" algn="l" defTabSz="457200" rtl="0" fontAlgn="auto" latinLnBrk="0" hangingPunct="0">
@@ -251,10 +250,10 @@
         </a:solidFill>
         <a:effectLst/>
         <a:uFillTx/>
-        <a:latin typeface="+mj-lt"/>
-        <a:ea typeface="+mj-ea"/>
-        <a:cs typeface="+mj-cs"/>
-        <a:sym typeface="Helvetica"/>
+        <a:latin typeface="+mn-lt"/>
+        <a:ea typeface="+mn-ea"/>
+        <a:cs typeface="+mn-cs"/>
+        <a:sym typeface="Calibri"/>
       </a:defRPr>
     </a:lvl7pPr>
     <a:lvl8pPr marL="0" marR="0" indent="0" algn="l" defTabSz="457200" rtl="0" fontAlgn="auto" latinLnBrk="0" hangingPunct="0">
@@ -281,10 +280,10 @@
         </a:solidFill>
         <a:effectLst/>
         <a:uFillTx/>
-        <a:latin typeface="+mj-lt"/>
-        <a:ea typeface="+mj-ea"/>
-        <a:cs typeface="+mj-cs"/>
-        <a:sym typeface="Helvetica"/>
+        <a:latin typeface="+mn-lt"/>
+        <a:ea typeface="+mn-ea"/>
+        <a:cs typeface="+mn-cs"/>
+        <a:sym typeface="Calibri"/>
       </a:defRPr>
     </a:lvl8pPr>
     <a:lvl9pPr marL="0" marR="0" indent="0" algn="l" defTabSz="457200" rtl="0" fontAlgn="auto" latinLnBrk="0" hangingPunct="0">
@@ -311,10 +310,10 @@
         </a:solidFill>
         <a:effectLst/>
         <a:uFillTx/>
-        <a:latin typeface="+mj-lt"/>
-        <a:ea typeface="+mj-ea"/>
-        <a:cs typeface="+mj-cs"/>
-        <a:sym typeface="Helvetica"/>
+        <a:latin typeface="+mn-lt"/>
+        <a:ea typeface="+mn-ea"/>
+        <a:cs typeface="+mn-cs"/>
+        <a:sym typeface="Calibri"/>
       </a:defRPr>
     </a:lvl9pPr>
   </p:defaultTextStyle>
@@ -536,7 +535,7 @@
         <p:spPr>
           <a:xfrm>
             <a:off x="427896" y="2479367"/>
-            <a:ext cx="5267655" cy="978611"/>
+            <a:ext cx="5267655" cy="978612"/>
           </a:xfrm>
           <a:prstGeom prst="rect">
             <a:avLst/>
@@ -709,7 +708,7 @@
         <p:spPr>
           <a:xfrm>
             <a:off x="-1" y="6049340"/>
-            <a:ext cx="9157815" cy="808662"/>
+            <a:ext cx="9157815" cy="808663"/>
           </a:xfrm>
           <a:prstGeom prst="rect">
             <a:avLst/>
@@ -739,10 +738,6 @@
                 <a:solidFill>
                   <a:srgbClr val="FFFFFF"/>
                 </a:solidFill>
-                <a:latin typeface="+mn-lt"/>
-                <a:ea typeface="+mn-ea"/>
-                <a:cs typeface="+mn-cs"/>
-                <a:sym typeface="Calibri"/>
               </a:defRPr>
             </a:pPr>
           </a:p>
@@ -767,7 +762,7 @@
         <p:spPr>
           <a:xfrm>
             <a:off x="5831904" y="6371261"/>
-            <a:ext cx="3067999" cy="223849"/>
+            <a:ext cx="3068000" cy="223850"/>
           </a:xfrm>
           <a:prstGeom prst="rect">
             <a:avLst/>
@@ -786,7 +781,7 @@
         <p:spPr>
           <a:xfrm>
             <a:off x="-1" y="5956648"/>
-            <a:ext cx="9144001" cy="92701"/>
+            <a:ext cx="9144001" cy="92702"/>
           </a:xfrm>
           <a:prstGeom prst="rect">
             <a:avLst/>
@@ -814,10 +809,6 @@
                 <a:solidFill>
                   <a:srgbClr val="FFFFFF"/>
                 </a:solidFill>
-                <a:latin typeface="+mn-lt"/>
-                <a:ea typeface="+mn-ea"/>
-                <a:cs typeface="+mn-cs"/>
-                <a:sym typeface="Calibri"/>
               </a:defRPr>
             </a:pPr>
           </a:p>
@@ -941,7 +932,7 @@
         <p:spPr>
           <a:xfrm>
             <a:off x="4645025" y="1535112"/>
-            <a:ext cx="4041775" cy="639765"/>
+            <a:ext cx="4041775" cy="639766"/>
           </a:xfrm>
           <a:prstGeom prst="rect">
             <a:avLst/>
@@ -964,6 +955,10 @@
           </p:nvPr>
         </p:nvSpPr>
         <p:spPr>
+          <a:xfrm>
+            <a:off x="6553200" y="6259832"/>
+            <a:ext cx="203020" cy="193037"/>
+          </a:xfrm>
           <a:prstGeom prst="rect">
             <a:avLst/>
           </a:prstGeom>
@@ -1011,8 +1006,8 @@
         </p:nvSpPr>
         <p:spPr>
           <a:xfrm>
-            <a:off x="-1" y="6049341"/>
-            <a:ext cx="9157815" cy="808659"/>
+            <a:off x="-1" y="6049340"/>
+            <a:ext cx="9157815" cy="808660"/>
           </a:xfrm>
           <a:prstGeom prst="rect">
             <a:avLst/>
@@ -1042,10 +1037,6 @@
                 <a:solidFill>
                   <a:srgbClr val="FFFFFF"/>
                 </a:solidFill>
-                <a:latin typeface="+mn-lt"/>
-                <a:ea typeface="+mn-ea"/>
-                <a:cs typeface="+mn-cs"/>
-                <a:sym typeface="Calibri"/>
               </a:defRPr>
             </a:pPr>
           </a:p>
@@ -1070,7 +1061,7 @@
         <p:spPr>
           <a:xfrm>
             <a:off x="5831904" y="6371261"/>
-            <a:ext cx="3067996" cy="223846"/>
+            <a:ext cx="3067997" cy="223847"/>
           </a:xfrm>
           <a:prstGeom prst="rect">
             <a:avLst/>
@@ -1089,7 +1080,7 @@
         <p:spPr>
           <a:xfrm>
             <a:off x="-1" y="5956648"/>
-            <a:ext cx="9144001" cy="92698"/>
+            <a:ext cx="9144001" cy="92699"/>
           </a:xfrm>
           <a:prstGeom prst="rect">
             <a:avLst/>
@@ -1117,10 +1108,6 @@
                 <a:solidFill>
                   <a:srgbClr val="FFFFFF"/>
                 </a:solidFill>
-                <a:latin typeface="+mn-lt"/>
-                <a:ea typeface="+mn-ea"/>
-                <a:cs typeface="+mn-cs"/>
-                <a:sym typeface="Calibri"/>
               </a:defRPr>
             </a:pPr>
           </a:p>
@@ -1137,14 +1124,14 @@
         <p:spPr>
           <a:xfrm>
             <a:off x="427893" y="530103"/>
-            <a:ext cx="5267657" cy="1731952"/>
+            <a:ext cx="5267658" cy="1731953"/>
           </a:xfrm>
           <a:prstGeom prst="rect">
             <a:avLst/>
           </a:prstGeom>
         </p:spPr>
         <p:txBody>
-          <a:bodyPr lIns="45719" tIns="45719" rIns="45719" bIns="45719"/>
+          <a:bodyPr lIns="45718" tIns="45718" rIns="45718" bIns="45718"/>
           <a:lstStyle>
             <a:lvl1pPr>
               <a:defRPr>
@@ -1173,14 +1160,14 @@
         <p:spPr>
           <a:xfrm>
             <a:off x="427896" y="2479367"/>
-            <a:ext cx="5267655" cy="978608"/>
+            <a:ext cx="5267655" cy="978609"/>
           </a:xfrm>
           <a:prstGeom prst="rect">
             <a:avLst/>
           </a:prstGeom>
         </p:spPr>
         <p:txBody>
-          <a:bodyPr lIns="45719" tIns="45719" rIns="45719" bIns="45719"/>
+          <a:bodyPr lIns="45718" tIns="45718" rIns="45718" bIns="45718"/>
           <a:lstStyle>
             <a:lvl1pPr marL="0" indent="0">
               <a:buSzTx/>
@@ -1196,7 +1183,7 @@
                 <a:sym typeface="Helvetica Neue"/>
               </a:defRPr>
             </a:lvl1pPr>
-            <a:lvl2pPr marL="0" indent="342991">
+            <a:lvl2pPr marL="0" indent="0">
               <a:buSzTx/>
               <a:buFontTx/>
               <a:buNone/>
@@ -1210,7 +1197,7 @@
                 <a:sym typeface="Helvetica Neue"/>
               </a:defRPr>
             </a:lvl2pPr>
-            <a:lvl3pPr marL="0" indent="685982">
+            <a:lvl3pPr marL="0" indent="0">
               <a:buSzTx/>
               <a:buFontTx/>
               <a:buNone/>
@@ -1224,7 +1211,7 @@
                 <a:sym typeface="Helvetica Neue"/>
               </a:defRPr>
             </a:lvl3pPr>
-            <a:lvl4pPr marL="0" indent="1028974">
+            <a:lvl4pPr marL="0" indent="0">
               <a:buSzTx/>
               <a:buFontTx/>
               <a:buNone/>
@@ -1238,7 +1225,7 @@
                 <a:sym typeface="Helvetica Neue"/>
               </a:defRPr>
             </a:lvl4pPr>
-            <a:lvl5pPr marL="0" indent="1371965">
+            <a:lvl5pPr marL="0" indent="0">
               <a:buSzTx/>
               <a:buFontTx/>
               <a:buNone/>
@@ -1295,15 +1282,15 @@
         </p:nvSpPr>
         <p:spPr>
           <a:xfrm>
-            <a:off x="427896" y="6210693"/>
-            <a:ext cx="203024" cy="193041"/>
+            <a:off x="427896" y="6210694"/>
+            <a:ext cx="203022" cy="193039"/>
           </a:xfrm>
           <a:prstGeom prst="rect">
             <a:avLst/>
           </a:prstGeom>
         </p:spPr>
         <p:txBody>
-          <a:bodyPr lIns="45719" tIns="45719" rIns="45719" bIns="45719"/>
+          <a:bodyPr lIns="45718" tIns="45718" rIns="45718" bIns="45718"/>
           <a:lstStyle/>
           <a:p>
             <a:pPr/>
@@ -1345,8 +1332,8 @@
         </p:nvSpPr>
         <p:spPr>
           <a:xfrm>
-            <a:off x="-1" y="6049341"/>
-            <a:ext cx="9157815" cy="808659"/>
+            <a:off x="-1" y="6049340"/>
+            <a:ext cx="9157815" cy="808660"/>
           </a:xfrm>
           <a:prstGeom prst="rect">
             <a:avLst/>
@@ -1376,10 +1363,6 @@
                 <a:solidFill>
                   <a:srgbClr val="FFFFFF"/>
                 </a:solidFill>
-                <a:latin typeface="+mn-lt"/>
-                <a:ea typeface="+mn-ea"/>
-                <a:cs typeface="+mn-cs"/>
-                <a:sym typeface="Calibri"/>
               </a:defRPr>
             </a:pPr>
           </a:p>
@@ -1404,7 +1387,7 @@
         <p:spPr>
           <a:xfrm>
             <a:off x="5831904" y="6371261"/>
-            <a:ext cx="3067996" cy="223846"/>
+            <a:ext cx="3067997" cy="223847"/>
           </a:xfrm>
           <a:prstGeom prst="rect">
             <a:avLst/>
@@ -1423,7 +1406,7 @@
         <p:spPr>
           <a:xfrm>
             <a:off x="-1" y="5956648"/>
-            <a:ext cx="9144001" cy="92698"/>
+            <a:ext cx="9144001" cy="92699"/>
           </a:xfrm>
           <a:prstGeom prst="rect">
             <a:avLst/>
@@ -1451,10 +1434,6 @@
                 <a:solidFill>
                   <a:srgbClr val="FFFFFF"/>
                 </a:solidFill>
-                <a:latin typeface="+mn-lt"/>
-                <a:ea typeface="+mn-ea"/>
-                <a:cs typeface="+mn-cs"/>
-                <a:sym typeface="Calibri"/>
               </a:defRPr>
             </a:pPr>
           </a:p>
@@ -1470,15 +1449,15 @@
         </p:nvSpPr>
         <p:spPr>
           <a:xfrm>
-            <a:off x="213474" y="341768"/>
-            <a:ext cx="8686427" cy="878968"/>
+            <a:off x="213474" y="341767"/>
+            <a:ext cx="8686428" cy="878969"/>
           </a:xfrm>
           <a:prstGeom prst="rect">
             <a:avLst/>
           </a:prstGeom>
         </p:spPr>
         <p:txBody>
-          <a:bodyPr lIns="45719" tIns="45719" rIns="45719" bIns="45719"/>
+          <a:bodyPr lIns="45718" tIns="45718" rIns="45718" bIns="45718"/>
           <a:lstStyle/>
           <a:p>
             <a:pPr/>
@@ -1499,20 +1478,20 @@
         <p:spPr>
           <a:xfrm>
             <a:off x="213474" y="1338867"/>
-            <a:ext cx="8686427" cy="4262712"/>
+            <a:ext cx="8686428" cy="4262712"/>
           </a:xfrm>
           <a:prstGeom prst="rect">
             <a:avLst/>
           </a:prstGeom>
         </p:spPr>
         <p:txBody>
-          <a:bodyPr lIns="45719" tIns="45719" rIns="45719" bIns="45719"/>
+          <a:bodyPr lIns="45718" tIns="45718" rIns="45718" bIns="45718"/>
           <a:lstStyle>
-            <a:lvl1pPr marL="257243" indent="-257243"/>
-            <a:lvl2pPr marL="587985" indent="-244994"/>
-            <a:lvl3pPr marL="914644" indent="-228661"/>
-            <a:lvl4pPr marL="1303367" indent="-274393"/>
-            <a:lvl5pPr marL="1646358" indent="-274393"/>
+            <a:lvl1pPr marL="257242" indent="-257242"/>
+            <a:lvl2pPr marL="587984"/>
+            <a:lvl3pPr marL="914643" indent="-228660"/>
+            <a:lvl4pPr marL="1303366" indent="-274392"/>
+            <a:lvl5pPr indent="-274392"/>
           </a:lstStyle>
           <a:p>
             <a:pPr/>
@@ -1556,8 +1535,8 @@
         </p:nvSpPr>
         <p:spPr>
           <a:xfrm>
-            <a:off x="6553200" y="6172200"/>
-            <a:ext cx="2133600" cy="368301"/>
+            <a:off x="6553200" y="6259832"/>
+            <a:ext cx="203020" cy="193037"/>
           </a:xfrm>
           <a:prstGeom prst="rect">
             <a:avLst/>
@@ -1606,8 +1585,8 @@
         </p:nvSpPr>
         <p:spPr>
           <a:xfrm>
-            <a:off x="-1" y="6049341"/>
-            <a:ext cx="9157815" cy="808659"/>
+            <a:off x="-1" y="6049340"/>
+            <a:ext cx="9157815" cy="808660"/>
           </a:xfrm>
           <a:prstGeom prst="rect">
             <a:avLst/>
@@ -1637,10 +1616,6 @@
                 <a:solidFill>
                   <a:srgbClr val="FFFFFF"/>
                 </a:solidFill>
-                <a:latin typeface="+mn-lt"/>
-                <a:ea typeface="+mn-ea"/>
-                <a:cs typeface="+mn-cs"/>
-                <a:sym typeface="Calibri"/>
               </a:defRPr>
             </a:pPr>
           </a:p>
@@ -1665,7 +1640,7 @@
         <p:spPr>
           <a:xfrm>
             <a:off x="5831904" y="6371261"/>
-            <a:ext cx="3067996" cy="223846"/>
+            <a:ext cx="3067997" cy="223847"/>
           </a:xfrm>
           <a:prstGeom prst="rect">
             <a:avLst/>
@@ -1684,7 +1659,7 @@
         <p:spPr>
           <a:xfrm>
             <a:off x="-1" y="5956648"/>
-            <a:ext cx="9144001" cy="92698"/>
+            <a:ext cx="9144001" cy="92699"/>
           </a:xfrm>
           <a:prstGeom prst="rect">
             <a:avLst/>
@@ -1712,10 +1687,6 @@
                 <a:solidFill>
                   <a:srgbClr val="FFFFFF"/>
                 </a:solidFill>
-                <a:latin typeface="+mn-lt"/>
-                <a:ea typeface="+mn-ea"/>
-                <a:cs typeface="+mn-cs"/>
-                <a:sym typeface="Calibri"/>
               </a:defRPr>
             </a:pPr>
           </a:p>
@@ -1732,14 +1703,14 @@
         <p:spPr>
           <a:xfrm>
             <a:off x="722312" y="4406905"/>
-            <a:ext cx="7772401" cy="1362076"/>
+            <a:ext cx="7772401" cy="1362077"/>
           </a:xfrm>
           <a:prstGeom prst="rect">
             <a:avLst/>
           </a:prstGeom>
         </p:spPr>
         <p:txBody>
-          <a:bodyPr lIns="45719" tIns="45719" rIns="45719" bIns="45719"/>
+          <a:bodyPr lIns="45718" tIns="45718" rIns="45718" bIns="45718"/>
           <a:lstStyle>
             <a:lvl1pPr>
               <a:defRPr cap="all" sz="3000"/>
@@ -1764,14 +1735,14 @@
         <p:spPr>
           <a:xfrm>
             <a:off x="722312" y="2906713"/>
-            <a:ext cx="7772401" cy="1500188"/>
+            <a:ext cx="7772401" cy="1500189"/>
           </a:xfrm>
           <a:prstGeom prst="rect">
             <a:avLst/>
           </a:prstGeom>
         </p:spPr>
         <p:txBody>
-          <a:bodyPr lIns="45719" tIns="45719" rIns="45719" bIns="45719" anchor="b"/>
+          <a:bodyPr lIns="45718" tIns="45718" rIns="45718" bIns="45718" anchor="b"/>
           <a:lstStyle>
             <a:lvl1pPr marL="0" indent="0">
               <a:spcBef>
@@ -1786,7 +1757,7 @@
                 </a:solidFill>
               </a:defRPr>
             </a:lvl1pPr>
-            <a:lvl2pPr marL="0" indent="342991">
+            <a:lvl2pPr marL="0" indent="0">
               <a:spcBef>
                 <a:spcPts val="300"/>
               </a:spcBef>
@@ -1799,7 +1770,7 @@
                 </a:solidFill>
               </a:defRPr>
             </a:lvl2pPr>
-            <a:lvl3pPr marL="0" indent="685982">
+            <a:lvl3pPr marL="0" indent="0">
               <a:spcBef>
                 <a:spcPts val="300"/>
               </a:spcBef>
@@ -1812,7 +1783,7 @@
                 </a:solidFill>
               </a:defRPr>
             </a:lvl3pPr>
-            <a:lvl4pPr marL="0" indent="1028974">
+            <a:lvl4pPr marL="0" indent="0">
               <a:spcBef>
                 <a:spcPts val="300"/>
               </a:spcBef>
@@ -1825,7 +1796,7 @@
                 </a:solidFill>
               </a:defRPr>
             </a:lvl4pPr>
-            <a:lvl5pPr marL="0" indent="1371965">
+            <a:lvl5pPr marL="0" indent="0">
               <a:spcBef>
                 <a:spcPts val="300"/>
               </a:spcBef>
@@ -1881,8 +1852,8 @@
         </p:nvSpPr>
         <p:spPr>
           <a:xfrm>
-            <a:off x="6553200" y="6172200"/>
-            <a:ext cx="2133600" cy="368301"/>
+            <a:off x="6553200" y="6259832"/>
+            <a:ext cx="203020" cy="193037"/>
           </a:xfrm>
           <a:prstGeom prst="rect">
             <a:avLst/>
@@ -1931,8 +1902,8 @@
         </p:nvSpPr>
         <p:spPr>
           <a:xfrm>
-            <a:off x="-1" y="6049341"/>
-            <a:ext cx="9157815" cy="808659"/>
+            <a:off x="-1" y="6049340"/>
+            <a:ext cx="9157815" cy="808660"/>
           </a:xfrm>
           <a:prstGeom prst="rect">
             <a:avLst/>
@@ -1962,10 +1933,6 @@
                 <a:solidFill>
                   <a:srgbClr val="FFFFFF"/>
                 </a:solidFill>
-                <a:latin typeface="+mn-lt"/>
-                <a:ea typeface="+mn-ea"/>
-                <a:cs typeface="+mn-cs"/>
-                <a:sym typeface="Calibri"/>
               </a:defRPr>
             </a:pPr>
           </a:p>
@@ -1990,7 +1957,7 @@
         <p:spPr>
           <a:xfrm>
             <a:off x="5831904" y="6371261"/>
-            <a:ext cx="3067996" cy="223846"/>
+            <a:ext cx="3067997" cy="223847"/>
           </a:xfrm>
           <a:prstGeom prst="rect">
             <a:avLst/>
@@ -2009,7 +1976,7 @@
         <p:spPr>
           <a:xfrm>
             <a:off x="-1" y="5956648"/>
-            <a:ext cx="9144001" cy="92698"/>
+            <a:ext cx="9144001" cy="92699"/>
           </a:xfrm>
           <a:prstGeom prst="rect">
             <a:avLst/>
@@ -2037,10 +2004,6 @@
                 <a:solidFill>
                   <a:srgbClr val="FFFFFF"/>
                 </a:solidFill>
-                <a:latin typeface="+mn-lt"/>
-                <a:ea typeface="+mn-ea"/>
-                <a:cs typeface="+mn-cs"/>
-                <a:sym typeface="Calibri"/>
               </a:defRPr>
             </a:pPr>
           </a:p>
@@ -2056,15 +2019,15 @@
         </p:nvSpPr>
         <p:spPr>
           <a:xfrm>
-            <a:off x="213474" y="341768"/>
-            <a:ext cx="8686427" cy="878968"/>
+            <a:off x="213474" y="341767"/>
+            <a:ext cx="8686428" cy="878969"/>
           </a:xfrm>
           <a:prstGeom prst="rect">
             <a:avLst/>
           </a:prstGeom>
         </p:spPr>
         <p:txBody>
-          <a:bodyPr lIns="45719" tIns="45719" rIns="45719" bIns="45719"/>
+          <a:bodyPr lIns="45718" tIns="45718" rIns="45718" bIns="45718"/>
           <a:lstStyle/>
           <a:p>
             <a:pPr/>
@@ -2084,15 +2047,15 @@
         </p:nvSpPr>
         <p:spPr>
           <a:xfrm>
-            <a:off x="427896" y="6156903"/>
-            <a:ext cx="203024" cy="193041"/>
+            <a:off x="427896" y="6156904"/>
+            <a:ext cx="203022" cy="193039"/>
           </a:xfrm>
           <a:prstGeom prst="rect">
             <a:avLst/>
           </a:prstGeom>
         </p:spPr>
         <p:txBody>
-          <a:bodyPr lIns="45719" tIns="45719" rIns="45719" bIns="45719"/>
+          <a:bodyPr lIns="45718" tIns="45718" rIns="45718" bIns="45718"/>
           <a:lstStyle/>
           <a:p>
             <a:pPr/>
@@ -2134,8 +2097,8 @@
         </p:nvSpPr>
         <p:spPr>
           <a:xfrm>
-            <a:off x="-1" y="6049341"/>
-            <a:ext cx="9157815" cy="808659"/>
+            <a:off x="-1" y="6049340"/>
+            <a:ext cx="9157815" cy="808660"/>
           </a:xfrm>
           <a:prstGeom prst="rect">
             <a:avLst/>
@@ -2165,10 +2128,6 @@
                 <a:solidFill>
                   <a:srgbClr val="FFFFFF"/>
                 </a:solidFill>
-                <a:latin typeface="+mn-lt"/>
-                <a:ea typeface="+mn-ea"/>
-                <a:cs typeface="+mn-cs"/>
-                <a:sym typeface="Calibri"/>
               </a:defRPr>
             </a:pPr>
           </a:p>
@@ -2193,7 +2152,7 @@
         <p:spPr>
           <a:xfrm>
             <a:off x="5831904" y="6371261"/>
-            <a:ext cx="3067996" cy="223846"/>
+            <a:ext cx="3067997" cy="223847"/>
           </a:xfrm>
           <a:prstGeom prst="rect">
             <a:avLst/>
@@ -2212,7 +2171,7 @@
         <p:spPr>
           <a:xfrm>
             <a:off x="-1" y="5956648"/>
-            <a:ext cx="9144001" cy="92698"/>
+            <a:ext cx="9144001" cy="92699"/>
           </a:xfrm>
           <a:prstGeom prst="rect">
             <a:avLst/>
@@ -2240,10 +2199,6 @@
                 <a:solidFill>
                   <a:srgbClr val="FFFFFF"/>
                 </a:solidFill>
-                <a:latin typeface="+mn-lt"/>
-                <a:ea typeface="+mn-ea"/>
-                <a:cs typeface="+mn-cs"/>
-                <a:sym typeface="Calibri"/>
               </a:defRPr>
             </a:pPr>
           </a:p>
@@ -2259,15 +2214,15 @@
         </p:nvSpPr>
         <p:spPr>
           <a:xfrm>
-            <a:off x="213474" y="341768"/>
-            <a:ext cx="8686427" cy="878968"/>
+            <a:off x="213474" y="341767"/>
+            <a:ext cx="8686428" cy="878969"/>
           </a:xfrm>
           <a:prstGeom prst="rect">
             <a:avLst/>
           </a:prstGeom>
         </p:spPr>
         <p:txBody>
-          <a:bodyPr lIns="45719" tIns="45719" rIns="45719" bIns="45719"/>
+          <a:bodyPr lIns="45718" tIns="45718" rIns="45718" bIns="45718"/>
           <a:lstStyle/>
           <a:p>
             <a:pPr/>
@@ -2287,15 +2242,15 @@
         </p:nvSpPr>
         <p:spPr>
           <a:xfrm>
-            <a:off x="427896" y="6156903"/>
-            <a:ext cx="203024" cy="193041"/>
+            <a:off x="427896" y="6156904"/>
+            <a:ext cx="203022" cy="193039"/>
           </a:xfrm>
           <a:prstGeom prst="rect">
             <a:avLst/>
           </a:prstGeom>
         </p:spPr>
         <p:txBody>
-          <a:bodyPr lIns="45719" tIns="45719" rIns="45719" bIns="45719"/>
+          <a:bodyPr lIns="45718" tIns="45718" rIns="45718" bIns="45718"/>
           <a:lstStyle/>
           <a:p>
             <a:pPr/>
@@ -2337,8 +2292,8 @@
         </p:nvSpPr>
         <p:spPr>
           <a:xfrm>
-            <a:off x="-1" y="6049341"/>
-            <a:ext cx="9157815" cy="808659"/>
+            <a:off x="-1" y="6049340"/>
+            <a:ext cx="9157815" cy="808660"/>
           </a:xfrm>
           <a:prstGeom prst="rect">
             <a:avLst/>
@@ -2368,10 +2323,6 @@
                 <a:solidFill>
                   <a:srgbClr val="FFFFFF"/>
                 </a:solidFill>
-                <a:latin typeface="+mn-lt"/>
-                <a:ea typeface="+mn-ea"/>
-                <a:cs typeface="+mn-cs"/>
-                <a:sym typeface="Calibri"/>
               </a:defRPr>
             </a:pPr>
           </a:p>
@@ -2396,7 +2347,7 @@
         <p:spPr>
           <a:xfrm>
             <a:off x="5831904" y="6371261"/>
-            <a:ext cx="3067996" cy="223846"/>
+            <a:ext cx="3067997" cy="223847"/>
           </a:xfrm>
           <a:prstGeom prst="rect">
             <a:avLst/>
@@ -2415,7 +2366,7 @@
         <p:spPr>
           <a:xfrm>
             <a:off x="-1" y="5956648"/>
-            <a:ext cx="9144001" cy="92698"/>
+            <a:ext cx="9144001" cy="92699"/>
           </a:xfrm>
           <a:prstGeom prst="rect">
             <a:avLst/>
@@ -2443,10 +2394,6 @@
                 <a:solidFill>
                   <a:srgbClr val="FFFFFF"/>
                 </a:solidFill>
-                <a:latin typeface="+mn-lt"/>
-                <a:ea typeface="+mn-ea"/>
-                <a:cs typeface="+mn-cs"/>
-                <a:sym typeface="Calibri"/>
               </a:defRPr>
             </a:pPr>
           </a:p>
@@ -2462,15 +2409,15 @@
         </p:nvSpPr>
         <p:spPr>
           <a:xfrm>
-            <a:off x="213474" y="341768"/>
-            <a:ext cx="8686427" cy="878968"/>
+            <a:off x="213474" y="341767"/>
+            <a:ext cx="8686428" cy="878969"/>
           </a:xfrm>
           <a:prstGeom prst="rect">
             <a:avLst/>
           </a:prstGeom>
         </p:spPr>
         <p:txBody>
-          <a:bodyPr lIns="45719" tIns="45719" rIns="45719" bIns="45719"/>
+          <a:bodyPr lIns="45718" tIns="45718" rIns="45718" bIns="45718"/>
           <a:lstStyle/>
           <a:p>
             <a:pPr/>
@@ -2498,15 +2445,15 @@
           </a:prstGeom>
         </p:spPr>
         <p:txBody>
-          <a:bodyPr lIns="45719" tIns="45719" rIns="45719" bIns="45719"/>
+          <a:bodyPr lIns="45718" tIns="45718" rIns="45718" bIns="45718"/>
           <a:lstStyle>
-            <a:lvl1pPr marL="257243" indent="-257243">
+            <a:lvl1pPr marL="257242" indent="-257242">
               <a:defRPr sz="2100"/>
             </a:lvl1pPr>
-            <a:lvl2pPr marL="593089" indent="-250098">
+            <a:lvl2pPr marL="593088" indent="-250098">
               <a:defRPr sz="2100"/>
             </a:lvl2pPr>
-            <a:lvl3pPr marL="926077" indent="-240094">
+            <a:lvl3pPr marL="926077" indent="-240093">
               <a:defRPr sz="2100"/>
             </a:lvl3pPr>
             <a:lvl4pPr marL="1306006" indent="-277032">
@@ -2558,15 +2505,15 @@
         </p:nvSpPr>
         <p:spPr>
           <a:xfrm>
-            <a:off x="427896" y="6156903"/>
-            <a:ext cx="203024" cy="193041"/>
+            <a:off x="427896" y="6156904"/>
+            <a:ext cx="203022" cy="193039"/>
           </a:xfrm>
           <a:prstGeom prst="rect">
             <a:avLst/>
           </a:prstGeom>
         </p:spPr>
         <p:txBody>
-          <a:bodyPr lIns="45719" tIns="45719" rIns="45719" bIns="45719"/>
+          <a:bodyPr lIns="45718" tIns="45718" rIns="45718" bIns="45718"/>
           <a:lstStyle/>
           <a:p>
             <a:pPr/>
@@ -2608,8 +2555,8 @@
         </p:nvSpPr>
         <p:spPr>
           <a:xfrm>
-            <a:off x="-1" y="6049341"/>
-            <a:ext cx="9157815" cy="808659"/>
+            <a:off x="-1" y="6049340"/>
+            <a:ext cx="9157815" cy="808660"/>
           </a:xfrm>
           <a:prstGeom prst="rect">
             <a:avLst/>
@@ -2639,10 +2586,6 @@
                 <a:solidFill>
                   <a:srgbClr val="FFFFFF"/>
                 </a:solidFill>
-                <a:latin typeface="+mn-lt"/>
-                <a:ea typeface="+mn-ea"/>
-                <a:cs typeface="+mn-cs"/>
-                <a:sym typeface="Calibri"/>
               </a:defRPr>
             </a:pPr>
           </a:p>
@@ -2667,7 +2610,7 @@
         <p:spPr>
           <a:xfrm>
             <a:off x="5831904" y="6371261"/>
-            <a:ext cx="3067996" cy="223846"/>
+            <a:ext cx="3067997" cy="223847"/>
           </a:xfrm>
           <a:prstGeom prst="rect">
             <a:avLst/>
@@ -2686,7 +2629,7 @@
         <p:spPr>
           <a:xfrm>
             <a:off x="-1" y="5956648"/>
-            <a:ext cx="9144001" cy="92698"/>
+            <a:ext cx="9144001" cy="92699"/>
           </a:xfrm>
           <a:prstGeom prst="rect">
             <a:avLst/>
@@ -2714,10 +2657,6 @@
                 <a:solidFill>
                   <a:srgbClr val="FFFFFF"/>
                 </a:solidFill>
-                <a:latin typeface="+mn-lt"/>
-                <a:ea typeface="+mn-ea"/>
-                <a:cs typeface="+mn-cs"/>
-                <a:sym typeface="Calibri"/>
               </a:defRPr>
             </a:pPr>
           </a:p>
@@ -2733,15 +2672,15 @@
         </p:nvSpPr>
         <p:spPr>
           <a:xfrm>
-            <a:off x="213474" y="341768"/>
-            <a:ext cx="8686427" cy="878968"/>
+            <a:off x="213474" y="341767"/>
+            <a:ext cx="8686428" cy="878969"/>
           </a:xfrm>
           <a:prstGeom prst="rect">
             <a:avLst/>
           </a:prstGeom>
         </p:spPr>
         <p:txBody>
-          <a:bodyPr lIns="45719" tIns="45719" rIns="45719" bIns="45719"/>
+          <a:bodyPr lIns="45718" tIns="45718" rIns="45718" bIns="45718"/>
           <a:lstStyle/>
           <a:p>
             <a:pPr/>
@@ -2769,7 +2708,7 @@
           </a:prstGeom>
         </p:spPr>
         <p:txBody>
-          <a:bodyPr lIns="45719" tIns="45719" rIns="45719" bIns="45719" anchor="b"/>
+          <a:bodyPr lIns="45718" tIns="45718" rIns="45718" bIns="45718" anchor="b"/>
           <a:lstStyle>
             <a:lvl1pPr marL="0" indent="0">
               <a:spcBef>
@@ -2780,7 +2719,7 @@
               <a:buNone/>
               <a:defRPr b="1" sz="1800"/>
             </a:lvl1pPr>
-            <a:lvl2pPr marL="0" indent="342991">
+            <a:lvl2pPr marL="0" indent="0">
               <a:spcBef>
                 <a:spcPts val="400"/>
               </a:spcBef>
@@ -2789,7 +2728,7 @@
               <a:buNone/>
               <a:defRPr b="1" sz="1800"/>
             </a:lvl2pPr>
-            <a:lvl3pPr marL="0" indent="685982">
+            <a:lvl3pPr marL="0" indent="0">
               <a:spcBef>
                 <a:spcPts val="400"/>
               </a:spcBef>
@@ -2798,7 +2737,7 @@
               <a:buNone/>
               <a:defRPr b="1" sz="1800"/>
             </a:lvl3pPr>
-            <a:lvl4pPr marL="0" indent="1028974">
+            <a:lvl4pPr marL="0" indent="0">
               <a:spcBef>
                 <a:spcPts val="400"/>
               </a:spcBef>
@@ -2807,7 +2746,7 @@
               <a:buNone/>
               <a:defRPr b="1" sz="1800"/>
             </a:lvl4pPr>
-            <a:lvl5pPr marL="0" indent="1371965">
+            <a:lvl5pPr marL="0" indent="0">
               <a:spcBef>
                 <a:spcPts val="400"/>
               </a:spcBef>
@@ -2860,25 +2799,17 @@
         <p:spPr>
           <a:xfrm>
             <a:off x="4645025" y="1535112"/>
-            <a:ext cx="4041775" cy="639763"/>
+            <a:ext cx="4041775" cy="639764"/>
           </a:xfrm>
           <a:prstGeom prst="rect">
             <a:avLst/>
           </a:prstGeom>
         </p:spPr>
         <p:txBody>
-          <a:bodyPr lIns="45719" tIns="45719" rIns="45719" bIns="45719" anchor="b"/>
+          <a:bodyPr lIns="45718" tIns="45718" rIns="45718" bIns="45718" anchor="b"/>
           <a:lstStyle/>
           <a:p>
-            <a:pPr marL="0" indent="0">
-              <a:spcBef>
-                <a:spcPts val="400"/>
-              </a:spcBef>
-              <a:buSzTx/>
-              <a:buFontTx/>
-              <a:buNone/>
-              <a:defRPr b="1" sz="1800"/>
-            </a:pPr>
+            <a:pPr/>
           </a:p>
         </p:txBody>
       </p:sp>
@@ -2892,15 +2823,15 @@
         </p:nvSpPr>
         <p:spPr>
           <a:xfrm>
-            <a:off x="427896" y="6156903"/>
-            <a:ext cx="203024" cy="193041"/>
+            <a:off x="427896" y="6156904"/>
+            <a:ext cx="203022" cy="193039"/>
           </a:xfrm>
           <a:prstGeom prst="rect">
             <a:avLst/>
           </a:prstGeom>
         </p:spPr>
         <p:txBody>
-          <a:bodyPr lIns="45719" tIns="45719" rIns="45719" bIns="45719"/>
+          <a:bodyPr lIns="45718" tIns="45718" rIns="45718" bIns="45718"/>
           <a:lstStyle/>
           <a:p>
             <a:pPr/>
@@ -2942,8 +2873,8 @@
         </p:nvSpPr>
         <p:spPr>
           <a:xfrm>
-            <a:off x="-1" y="6049341"/>
-            <a:ext cx="9157815" cy="808659"/>
+            <a:off x="-1" y="6049340"/>
+            <a:ext cx="9157815" cy="808660"/>
           </a:xfrm>
           <a:prstGeom prst="rect">
             <a:avLst/>
@@ -2973,10 +2904,6 @@
                 <a:solidFill>
                   <a:srgbClr val="FFFFFF"/>
                 </a:solidFill>
-                <a:latin typeface="+mn-lt"/>
-                <a:ea typeface="+mn-ea"/>
-                <a:cs typeface="+mn-cs"/>
-                <a:sym typeface="Calibri"/>
               </a:defRPr>
             </a:pPr>
           </a:p>
@@ -3001,7 +2928,7 @@
         <p:spPr>
           <a:xfrm>
             <a:off x="5831904" y="6371261"/>
-            <a:ext cx="3067996" cy="223846"/>
+            <a:ext cx="3067997" cy="223847"/>
           </a:xfrm>
           <a:prstGeom prst="rect">
             <a:avLst/>
@@ -3020,7 +2947,7 @@
         <p:spPr>
           <a:xfrm>
             <a:off x="-1" y="5956648"/>
-            <a:ext cx="9144001" cy="92698"/>
+            <a:ext cx="9144001" cy="92699"/>
           </a:xfrm>
           <a:prstGeom prst="rect">
             <a:avLst/>
@@ -3048,10 +2975,6 @@
                 <a:solidFill>
                   <a:srgbClr val="FFFFFF"/>
                 </a:solidFill>
-                <a:latin typeface="+mn-lt"/>
-                <a:ea typeface="+mn-ea"/>
-                <a:cs typeface="+mn-cs"/>
-                <a:sym typeface="Calibri"/>
               </a:defRPr>
             </a:pPr>
           </a:p>
@@ -3067,15 +2990,15 @@
         </p:nvSpPr>
         <p:spPr>
           <a:xfrm>
-            <a:off x="213474" y="341768"/>
-            <a:ext cx="8686427" cy="878968"/>
+            <a:off x="213474" y="341767"/>
+            <a:ext cx="8686428" cy="878969"/>
           </a:xfrm>
           <a:prstGeom prst="rect">
             <a:avLst/>
           </a:prstGeom>
         </p:spPr>
         <p:txBody>
-          <a:bodyPr lIns="45719" tIns="45719" rIns="45719" bIns="45719"/>
+          <a:bodyPr lIns="45718" tIns="45718" rIns="45718" bIns="45718"/>
           <a:lstStyle/>
           <a:p>
             <a:pPr/>
@@ -3095,15 +3018,15 @@
         </p:nvSpPr>
         <p:spPr>
           <a:xfrm>
-            <a:off x="427896" y="6156903"/>
-            <a:ext cx="203024" cy="193041"/>
+            <a:off x="427896" y="6156904"/>
+            <a:ext cx="203022" cy="193039"/>
           </a:xfrm>
           <a:prstGeom prst="rect">
             <a:avLst/>
           </a:prstGeom>
         </p:spPr>
         <p:txBody>
-          <a:bodyPr lIns="45719" tIns="45719" rIns="45719" bIns="45719"/>
+          <a:bodyPr lIns="45718" tIns="45718" rIns="45718" bIns="45718"/>
           <a:lstStyle/>
           <a:p>
             <a:pPr/>
@@ -3145,8 +3068,8 @@
         </p:nvSpPr>
         <p:spPr>
           <a:xfrm>
-            <a:off x="-1" y="6049341"/>
-            <a:ext cx="9157815" cy="808659"/>
+            <a:off x="-1" y="6049340"/>
+            <a:ext cx="9157815" cy="808660"/>
           </a:xfrm>
           <a:prstGeom prst="rect">
             <a:avLst/>
@@ -3176,10 +3099,6 @@
                 <a:solidFill>
                   <a:srgbClr val="FFFFFF"/>
                 </a:solidFill>
-                <a:latin typeface="+mn-lt"/>
-                <a:ea typeface="+mn-ea"/>
-                <a:cs typeface="+mn-cs"/>
-                <a:sym typeface="Calibri"/>
               </a:defRPr>
             </a:pPr>
           </a:p>
@@ -3204,7 +3123,7 @@
         <p:spPr>
           <a:xfrm>
             <a:off x="5831904" y="6371261"/>
-            <a:ext cx="3067996" cy="223846"/>
+            <a:ext cx="3067997" cy="223847"/>
           </a:xfrm>
           <a:prstGeom prst="rect">
             <a:avLst/>
@@ -3223,7 +3142,7 @@
         <p:spPr>
           <a:xfrm>
             <a:off x="-1" y="5956648"/>
-            <a:ext cx="9144001" cy="92698"/>
+            <a:ext cx="9144001" cy="92699"/>
           </a:xfrm>
           <a:prstGeom prst="rect">
             <a:avLst/>
@@ -3251,10 +3170,6 @@
                 <a:solidFill>
                   <a:srgbClr val="FFFFFF"/>
                 </a:solidFill>
-                <a:latin typeface="+mn-lt"/>
-                <a:ea typeface="+mn-ea"/>
-                <a:cs typeface="+mn-cs"/>
-                <a:sym typeface="Calibri"/>
               </a:defRPr>
             </a:pPr>
           </a:p>
@@ -3270,15 +3185,15 @@
         </p:nvSpPr>
         <p:spPr>
           <a:xfrm>
-            <a:off x="427896" y="6156903"/>
-            <a:ext cx="203024" cy="193041"/>
+            <a:off x="427896" y="6156904"/>
+            <a:ext cx="203022" cy="193039"/>
           </a:xfrm>
           <a:prstGeom prst="rect">
             <a:avLst/>
           </a:prstGeom>
         </p:spPr>
         <p:txBody>
-          <a:bodyPr lIns="45719" tIns="45719" rIns="45719" bIns="45719"/>
+          <a:bodyPr lIns="45718" tIns="45718" rIns="45718" bIns="45718"/>
           <a:lstStyle/>
           <a:p>
             <a:pPr/>
@@ -3440,8 +3355,8 @@
         </p:nvSpPr>
         <p:spPr>
           <a:xfrm>
-            <a:off x="-1" y="6049341"/>
-            <a:ext cx="9157815" cy="808659"/>
+            <a:off x="-1" y="6049340"/>
+            <a:ext cx="9157815" cy="808660"/>
           </a:xfrm>
           <a:prstGeom prst="rect">
             <a:avLst/>
@@ -3471,10 +3386,6 @@
                 <a:solidFill>
                   <a:srgbClr val="FFFFFF"/>
                 </a:solidFill>
-                <a:latin typeface="+mn-lt"/>
-                <a:ea typeface="+mn-ea"/>
-                <a:cs typeface="+mn-cs"/>
-                <a:sym typeface="Calibri"/>
               </a:defRPr>
             </a:pPr>
           </a:p>
@@ -3499,7 +3410,7 @@
         <p:spPr>
           <a:xfrm>
             <a:off x="5831904" y="6371261"/>
-            <a:ext cx="3067996" cy="223846"/>
+            <a:ext cx="3067997" cy="223847"/>
           </a:xfrm>
           <a:prstGeom prst="rect">
             <a:avLst/>
@@ -3518,7 +3429,7 @@
         <p:spPr>
           <a:xfrm>
             <a:off x="-1" y="5956648"/>
-            <a:ext cx="9144001" cy="92698"/>
+            <a:ext cx="9144001" cy="92699"/>
           </a:xfrm>
           <a:prstGeom prst="rect">
             <a:avLst/>
@@ -3546,10 +3457,6 @@
                 <a:solidFill>
                   <a:srgbClr val="FFFFFF"/>
                 </a:solidFill>
-                <a:latin typeface="+mn-lt"/>
-                <a:ea typeface="+mn-ea"/>
-                <a:cs typeface="+mn-cs"/>
-                <a:sym typeface="Calibri"/>
               </a:defRPr>
             </a:pPr>
           </a:p>
@@ -3566,14 +3473,14 @@
         <p:spPr>
           <a:xfrm>
             <a:off x="457203" y="273050"/>
-            <a:ext cx="3008314" cy="1162050"/>
+            <a:ext cx="3008315" cy="1162050"/>
           </a:xfrm>
           <a:prstGeom prst="rect">
             <a:avLst/>
           </a:prstGeom>
         </p:spPr>
         <p:txBody>
-          <a:bodyPr lIns="45719" tIns="45719" rIns="45719" bIns="45719" anchor="b"/>
+          <a:bodyPr lIns="45718" tIns="45718" rIns="45718" bIns="45718" anchor="b"/>
           <a:lstStyle>
             <a:lvl1pPr>
               <a:defRPr sz="1500"/>
@@ -3605,13 +3512,13 @@
           </a:prstGeom>
         </p:spPr>
         <p:txBody>
-          <a:bodyPr lIns="45719" tIns="45719" rIns="45719" bIns="45719"/>
+          <a:bodyPr lIns="45718" tIns="45718" rIns="45718" bIns="45718"/>
           <a:lstStyle>
-            <a:lvl1pPr marL="257243" indent="-257243"/>
-            <a:lvl2pPr marL="587985" indent="-244994"/>
-            <a:lvl3pPr marL="914644" indent="-228661"/>
-            <a:lvl4pPr marL="1303367" indent="-274393"/>
-            <a:lvl5pPr marL="1646358" indent="-274393"/>
+            <a:lvl1pPr marL="257242" indent="-257242"/>
+            <a:lvl2pPr marL="587984"/>
+            <a:lvl3pPr marL="914643" indent="-228660"/>
+            <a:lvl4pPr marL="1303366" indent="-274392"/>
+            <a:lvl5pPr indent="-274392"/>
           </a:lstStyle>
           <a:p>
             <a:pPr/>
@@ -3655,26 +3562,18 @@
         </p:nvSpPr>
         <p:spPr>
           <a:xfrm>
-            <a:off x="457202" y="1435103"/>
-            <a:ext cx="3008315" cy="4691063"/>
+            <a:off x="457201" y="1435103"/>
+            <a:ext cx="3008317" cy="4691063"/>
           </a:xfrm>
           <a:prstGeom prst="rect">
             <a:avLst/>
           </a:prstGeom>
         </p:spPr>
         <p:txBody>
-          <a:bodyPr lIns="45719" tIns="45719" rIns="45719" bIns="45719"/>
+          <a:bodyPr lIns="45718" tIns="45718" rIns="45718" bIns="45718"/>
           <a:lstStyle/>
           <a:p>
-            <a:pPr marL="0" indent="0">
-              <a:spcBef>
-                <a:spcPts val="200"/>
-              </a:spcBef>
-              <a:buSzTx/>
-              <a:buFontTx/>
-              <a:buNone/>
-              <a:defRPr sz="1000"/>
-            </a:pPr>
+            <a:pPr/>
           </a:p>
         </p:txBody>
       </p:sp>
@@ -3688,15 +3587,15 @@
         </p:nvSpPr>
         <p:spPr>
           <a:xfrm>
-            <a:off x="427896" y="6156903"/>
-            <a:ext cx="203024" cy="193041"/>
+            <a:off x="427896" y="6156904"/>
+            <a:ext cx="203022" cy="193039"/>
           </a:xfrm>
           <a:prstGeom prst="rect">
             <a:avLst/>
           </a:prstGeom>
         </p:spPr>
         <p:txBody>
-          <a:bodyPr lIns="45719" tIns="45719" rIns="45719" bIns="45719"/>
+          <a:bodyPr lIns="45718" tIns="45718" rIns="45718" bIns="45718"/>
           <a:lstStyle/>
           <a:p>
             <a:pPr/>
@@ -3738,8 +3637,8 @@
         </p:nvSpPr>
         <p:spPr>
           <a:xfrm>
-            <a:off x="-1" y="6049341"/>
-            <a:ext cx="9157815" cy="808659"/>
+            <a:off x="-1" y="6049340"/>
+            <a:ext cx="9157815" cy="808660"/>
           </a:xfrm>
           <a:prstGeom prst="rect">
             <a:avLst/>
@@ -3769,10 +3668,6 @@
                 <a:solidFill>
                   <a:srgbClr val="FFFFFF"/>
                 </a:solidFill>
-                <a:latin typeface="+mn-lt"/>
-                <a:ea typeface="+mn-ea"/>
-                <a:cs typeface="+mn-cs"/>
-                <a:sym typeface="Calibri"/>
               </a:defRPr>
             </a:pPr>
           </a:p>
@@ -3797,7 +3692,7 @@
         <p:spPr>
           <a:xfrm>
             <a:off x="5831904" y="6371261"/>
-            <a:ext cx="3067996" cy="223846"/>
+            <a:ext cx="3067997" cy="223847"/>
           </a:xfrm>
           <a:prstGeom prst="rect">
             <a:avLst/>
@@ -3816,7 +3711,7 @@
         <p:spPr>
           <a:xfrm>
             <a:off x="-1" y="5956648"/>
-            <a:ext cx="9144001" cy="92698"/>
+            <a:ext cx="9144001" cy="92699"/>
           </a:xfrm>
           <a:prstGeom prst="rect">
             <a:avLst/>
@@ -3844,10 +3739,6 @@
                 <a:solidFill>
                   <a:srgbClr val="FFFFFF"/>
                 </a:solidFill>
-                <a:latin typeface="+mn-lt"/>
-                <a:ea typeface="+mn-ea"/>
-                <a:cs typeface="+mn-cs"/>
-                <a:sym typeface="Calibri"/>
               </a:defRPr>
             </a:pPr>
           </a:p>
@@ -3864,14 +3755,14 @@
         <p:spPr>
           <a:xfrm>
             <a:off x="1792288" y="4800600"/>
-            <a:ext cx="5486401" cy="566738"/>
+            <a:ext cx="5486402" cy="566738"/>
           </a:xfrm>
           <a:prstGeom prst="rect">
             <a:avLst/>
           </a:prstGeom>
         </p:spPr>
         <p:txBody>
-          <a:bodyPr lIns="45719" tIns="45719" rIns="45719" bIns="45719" anchor="b"/>
+          <a:bodyPr lIns="45718" tIns="45718" rIns="45718" bIns="45718" anchor="b"/>
           <a:lstStyle>
             <a:lvl1pPr>
               <a:defRPr sz="1500"/>
@@ -3896,7 +3787,7 @@
         <p:spPr>
           <a:xfrm>
             <a:off x="1792288" y="612775"/>
-            <a:ext cx="5486401" cy="4114800"/>
+            <a:ext cx="5486402" cy="4114800"/>
           </a:xfrm>
           <a:prstGeom prst="rect">
             <a:avLst/>
@@ -3923,14 +3814,14 @@
         <p:spPr>
           <a:xfrm>
             <a:off x="1792288" y="5367337"/>
-            <a:ext cx="5486401" cy="804863"/>
+            <a:ext cx="5486402" cy="804864"/>
           </a:xfrm>
           <a:prstGeom prst="rect">
             <a:avLst/>
           </a:prstGeom>
         </p:spPr>
         <p:txBody>
-          <a:bodyPr lIns="45719" tIns="45719" rIns="45719" bIns="45719"/>
+          <a:bodyPr lIns="45718" tIns="45718" rIns="45718" bIns="45718"/>
           <a:lstStyle>
             <a:lvl1pPr marL="0" indent="0">
               <a:spcBef>
@@ -3941,7 +3832,7 @@
               <a:buNone/>
               <a:defRPr sz="1000"/>
             </a:lvl1pPr>
-            <a:lvl2pPr marL="0" indent="342991">
+            <a:lvl2pPr marL="0" indent="0">
               <a:spcBef>
                 <a:spcPts val="200"/>
               </a:spcBef>
@@ -3950,7 +3841,7 @@
               <a:buNone/>
               <a:defRPr sz="1000"/>
             </a:lvl2pPr>
-            <a:lvl3pPr marL="0" indent="685982">
+            <a:lvl3pPr marL="0" indent="0">
               <a:spcBef>
                 <a:spcPts val="200"/>
               </a:spcBef>
@@ -3959,7 +3850,7 @@
               <a:buNone/>
               <a:defRPr sz="1000"/>
             </a:lvl3pPr>
-            <a:lvl4pPr marL="0" indent="1028974">
+            <a:lvl4pPr marL="0" indent="0">
               <a:spcBef>
                 <a:spcPts val="200"/>
               </a:spcBef>
@@ -3968,7 +3859,7 @@
               <a:buNone/>
               <a:defRPr sz="1000"/>
             </a:lvl4pPr>
-            <a:lvl5pPr marL="0" indent="1371965">
+            <a:lvl5pPr marL="0" indent="0">
               <a:spcBef>
                 <a:spcPts val="200"/>
               </a:spcBef>
@@ -4020,15 +3911,15 @@
         </p:nvSpPr>
         <p:spPr>
           <a:xfrm>
-            <a:off x="427896" y="6156903"/>
-            <a:ext cx="203024" cy="193041"/>
+            <a:off x="427896" y="6156904"/>
+            <a:ext cx="203022" cy="193039"/>
           </a:xfrm>
           <a:prstGeom prst="rect">
             <a:avLst/>
           </a:prstGeom>
         </p:spPr>
         <p:txBody>
-          <a:bodyPr lIns="45719" tIns="45719" rIns="45719" bIns="45719"/>
+          <a:bodyPr lIns="45718" tIns="45718" rIns="45718" bIns="45718"/>
           <a:lstStyle/>
           <a:p>
             <a:pPr/>
@@ -4071,7 +3962,7 @@
         <p:spPr>
           <a:xfrm>
             <a:off x="-1" y="6049340"/>
-            <a:ext cx="9157815" cy="808662"/>
+            <a:ext cx="9157815" cy="808663"/>
           </a:xfrm>
           <a:prstGeom prst="rect">
             <a:avLst/>
@@ -4101,10 +3992,6 @@
                 <a:solidFill>
                   <a:srgbClr val="FFFFFF"/>
                 </a:solidFill>
-                <a:latin typeface="+mn-lt"/>
-                <a:ea typeface="+mn-ea"/>
-                <a:cs typeface="+mn-cs"/>
-                <a:sym typeface="Calibri"/>
               </a:defRPr>
             </a:pPr>
           </a:p>
@@ -4129,7 +4016,7 @@
         <p:spPr>
           <a:xfrm>
             <a:off x="5831904" y="6371261"/>
-            <a:ext cx="3067999" cy="223849"/>
+            <a:ext cx="3068000" cy="223850"/>
           </a:xfrm>
           <a:prstGeom prst="rect">
             <a:avLst/>
@@ -4148,7 +4035,7 @@
         <p:spPr>
           <a:xfrm>
             <a:off x="-1" y="5956648"/>
-            <a:ext cx="9144001" cy="92701"/>
+            <a:ext cx="9144001" cy="92702"/>
           </a:xfrm>
           <a:prstGeom prst="rect">
             <a:avLst/>
@@ -4176,10 +4063,6 @@
                 <a:solidFill>
                   <a:srgbClr val="FFFFFF"/>
                 </a:solidFill>
-                <a:latin typeface="+mn-lt"/>
-                <a:ea typeface="+mn-ea"/>
-                <a:cs typeface="+mn-cs"/>
-                <a:sym typeface="Calibri"/>
               </a:defRPr>
             </a:pPr>
           </a:p>
@@ -4196,7 +4079,7 @@
         <p:spPr>
           <a:xfrm>
             <a:off x="722312" y="4406905"/>
-            <a:ext cx="7772401" cy="1362079"/>
+            <a:ext cx="7772401" cy="1362080"/>
           </a:xfrm>
           <a:prstGeom prst="rect">
             <a:avLst/>
@@ -4228,7 +4111,7 @@
         <p:spPr>
           <a:xfrm>
             <a:off x="722312" y="2906713"/>
-            <a:ext cx="7772401" cy="1500191"/>
+            <a:ext cx="7772401" cy="1500192"/>
           </a:xfrm>
           <a:prstGeom prst="rect">
             <a:avLst/>
@@ -4344,6 +4227,10 @@
           </p:nvPr>
         </p:nvSpPr>
         <p:spPr>
+          <a:xfrm>
+            <a:off x="6553200" y="6259832"/>
+            <a:ext cx="203020" cy="193037"/>
+          </a:xfrm>
           <a:prstGeom prst="rect">
             <a:avLst/>
           </a:prstGeom>
@@ -4392,7 +4279,7 @@
         <p:spPr>
           <a:xfrm>
             <a:off x="-1" y="6049340"/>
-            <a:ext cx="9157815" cy="808662"/>
+            <a:ext cx="9157815" cy="808663"/>
           </a:xfrm>
           <a:prstGeom prst="rect">
             <a:avLst/>
@@ -4422,10 +4309,6 @@
                 <a:solidFill>
                   <a:srgbClr val="FFFFFF"/>
                 </a:solidFill>
-                <a:latin typeface="+mn-lt"/>
-                <a:ea typeface="+mn-ea"/>
-                <a:cs typeface="+mn-cs"/>
-                <a:sym typeface="Calibri"/>
               </a:defRPr>
             </a:pPr>
           </a:p>
@@ -4450,7 +4333,7 @@
         <p:spPr>
           <a:xfrm>
             <a:off x="5831904" y="6371261"/>
-            <a:ext cx="3067999" cy="223849"/>
+            <a:ext cx="3068000" cy="223850"/>
           </a:xfrm>
           <a:prstGeom prst="rect">
             <a:avLst/>
@@ -4469,7 +4352,7 @@
         <p:spPr>
           <a:xfrm>
             <a:off x="-1" y="5956648"/>
-            <a:ext cx="9144001" cy="92701"/>
+            <a:ext cx="9144001" cy="92702"/>
           </a:xfrm>
           <a:prstGeom prst="rect">
             <a:avLst/>
@@ -4497,10 +4380,6 @@
                 <a:solidFill>
                   <a:srgbClr val="FFFFFF"/>
                 </a:solidFill>
-                <a:latin typeface="+mn-lt"/>
-                <a:ea typeface="+mn-ea"/>
-                <a:cs typeface="+mn-cs"/>
-                <a:sym typeface="Calibri"/>
               </a:defRPr>
             </a:pPr>
           </a:p>
@@ -4591,7 +4470,7 @@
         <p:spPr>
           <a:xfrm>
             <a:off x="-1" y="6049340"/>
-            <a:ext cx="9157815" cy="808662"/>
+            <a:ext cx="9157815" cy="808663"/>
           </a:xfrm>
           <a:prstGeom prst="rect">
             <a:avLst/>
@@ -4621,10 +4500,6 @@
                 <a:solidFill>
                   <a:srgbClr val="FFFFFF"/>
                 </a:solidFill>
-                <a:latin typeface="+mn-lt"/>
-                <a:ea typeface="+mn-ea"/>
-                <a:cs typeface="+mn-cs"/>
-                <a:sym typeface="Calibri"/>
               </a:defRPr>
             </a:pPr>
           </a:p>
@@ -4649,7 +4524,7 @@
         <p:spPr>
           <a:xfrm>
             <a:off x="5831904" y="6371261"/>
-            <a:ext cx="3067999" cy="223849"/>
+            <a:ext cx="3068000" cy="223850"/>
           </a:xfrm>
           <a:prstGeom prst="rect">
             <a:avLst/>
@@ -4668,7 +4543,7 @@
         <p:spPr>
           <a:xfrm>
             <a:off x="-1" y="5956648"/>
-            <a:ext cx="9144001" cy="92701"/>
+            <a:ext cx="9144001" cy="92702"/>
           </a:xfrm>
           <a:prstGeom prst="rect">
             <a:avLst/>
@@ -4696,10 +4571,6 @@
                 <a:solidFill>
                   <a:srgbClr val="FFFFFF"/>
                 </a:solidFill>
-                <a:latin typeface="+mn-lt"/>
-                <a:ea typeface="+mn-ea"/>
-                <a:cs typeface="+mn-cs"/>
-                <a:sym typeface="Calibri"/>
               </a:defRPr>
             </a:pPr>
           </a:p>
@@ -4790,7 +4661,7 @@
         <p:spPr>
           <a:xfrm>
             <a:off x="-1" y="6049340"/>
-            <a:ext cx="9157815" cy="808662"/>
+            <a:ext cx="9157815" cy="808663"/>
           </a:xfrm>
           <a:prstGeom prst="rect">
             <a:avLst/>
@@ -4820,10 +4691,6 @@
                 <a:solidFill>
                   <a:srgbClr val="FFFFFF"/>
                 </a:solidFill>
-                <a:latin typeface="+mn-lt"/>
-                <a:ea typeface="+mn-ea"/>
-                <a:cs typeface="+mn-cs"/>
-                <a:sym typeface="Calibri"/>
               </a:defRPr>
             </a:pPr>
           </a:p>
@@ -4848,7 +4715,7 @@
         <p:spPr>
           <a:xfrm>
             <a:off x="5831904" y="6371261"/>
-            <a:ext cx="3067999" cy="223849"/>
+            <a:ext cx="3068000" cy="223850"/>
           </a:xfrm>
           <a:prstGeom prst="rect">
             <a:avLst/>
@@ -4867,7 +4734,7 @@
         <p:spPr>
           <a:xfrm>
             <a:off x="-1" y="5956648"/>
-            <a:ext cx="9144001" cy="92701"/>
+            <a:ext cx="9144001" cy="92702"/>
           </a:xfrm>
           <a:prstGeom prst="rect">
             <a:avLst/>
@@ -4895,10 +4762,6 @@
                 <a:solidFill>
                   <a:srgbClr val="FFFFFF"/>
                 </a:solidFill>
-                <a:latin typeface="+mn-lt"/>
-                <a:ea typeface="+mn-ea"/>
-                <a:cs typeface="+mn-cs"/>
-                <a:sym typeface="Calibri"/>
               </a:defRPr>
             </a:pPr>
           </a:p>
@@ -4989,7 +4852,7 @@
         <p:spPr>
           <a:xfrm>
             <a:off x="-1" y="6049340"/>
-            <a:ext cx="9157815" cy="808662"/>
+            <a:ext cx="9157815" cy="808663"/>
           </a:xfrm>
           <a:prstGeom prst="rect">
             <a:avLst/>
@@ -5019,10 +4882,6 @@
                 <a:solidFill>
                   <a:srgbClr val="FFFFFF"/>
                 </a:solidFill>
-                <a:latin typeface="+mn-lt"/>
-                <a:ea typeface="+mn-ea"/>
-                <a:cs typeface="+mn-cs"/>
-                <a:sym typeface="Calibri"/>
               </a:defRPr>
             </a:pPr>
           </a:p>
@@ -5047,7 +4906,7 @@
         <p:spPr>
           <a:xfrm>
             <a:off x="5831904" y="6371261"/>
-            <a:ext cx="3067999" cy="223849"/>
+            <a:ext cx="3068000" cy="223850"/>
           </a:xfrm>
           <a:prstGeom prst="rect">
             <a:avLst/>
@@ -5066,7 +4925,7 @@
         <p:spPr>
           <a:xfrm>
             <a:off x="-1" y="5956648"/>
-            <a:ext cx="9144001" cy="92701"/>
+            <a:ext cx="9144001" cy="92702"/>
           </a:xfrm>
           <a:prstGeom prst="rect">
             <a:avLst/>
@@ -5094,10 +4953,6 @@
                 <a:solidFill>
                   <a:srgbClr val="FFFFFF"/>
                 </a:solidFill>
-                <a:latin typeface="+mn-lt"/>
-                <a:ea typeface="+mn-ea"/>
-                <a:cs typeface="+mn-cs"/>
-                <a:sym typeface="Calibri"/>
               </a:defRPr>
             </a:pPr>
           </a:p>
@@ -5164,7 +5019,7 @@
         <p:spPr>
           <a:xfrm>
             <a:off x="-1" y="6049340"/>
-            <a:ext cx="9157815" cy="808662"/>
+            <a:ext cx="9157815" cy="808663"/>
           </a:xfrm>
           <a:prstGeom prst="rect">
             <a:avLst/>
@@ -5194,10 +5049,6 @@
                 <a:solidFill>
                   <a:srgbClr val="FFFFFF"/>
                 </a:solidFill>
-                <a:latin typeface="+mn-lt"/>
-                <a:ea typeface="+mn-ea"/>
-                <a:cs typeface="+mn-cs"/>
-                <a:sym typeface="Calibri"/>
               </a:defRPr>
             </a:pPr>
           </a:p>
@@ -5222,7 +5073,7 @@
         <p:spPr>
           <a:xfrm>
             <a:off x="5831904" y="6371261"/>
-            <a:ext cx="3067999" cy="223849"/>
+            <a:ext cx="3068000" cy="223850"/>
           </a:xfrm>
           <a:prstGeom prst="rect">
             <a:avLst/>
@@ -5241,7 +5092,7 @@
         <p:spPr>
           <a:xfrm>
             <a:off x="-1" y="5956648"/>
-            <a:ext cx="9144001" cy="92701"/>
+            <a:ext cx="9144001" cy="92702"/>
           </a:xfrm>
           <a:prstGeom prst="rect">
             <a:avLst/>
@@ -5269,10 +5120,6 @@
                 <a:solidFill>
                   <a:srgbClr val="FFFFFF"/>
                 </a:solidFill>
-                <a:latin typeface="+mn-lt"/>
-                <a:ea typeface="+mn-ea"/>
-                <a:cs typeface="+mn-cs"/>
-                <a:sym typeface="Calibri"/>
               </a:defRPr>
             </a:pPr>
           </a:p>
@@ -5448,7 +5295,7 @@
         <p:spPr>
           <a:xfrm>
             <a:off x="-1" y="6049340"/>
-            <a:ext cx="9157815" cy="808662"/>
+            <a:ext cx="9157815" cy="808663"/>
           </a:xfrm>
           <a:prstGeom prst="rect">
             <a:avLst/>
@@ -5478,10 +5325,6 @@
                 <a:solidFill>
                   <a:srgbClr val="FFFFFF"/>
                 </a:solidFill>
-                <a:latin typeface="+mn-lt"/>
-                <a:ea typeface="+mn-ea"/>
-                <a:cs typeface="+mn-cs"/>
-                <a:sym typeface="Calibri"/>
               </a:defRPr>
             </a:pPr>
           </a:p>
@@ -5506,7 +5349,7 @@
         <p:spPr>
           <a:xfrm>
             <a:off x="5831904" y="6371261"/>
-            <a:ext cx="3067999" cy="223849"/>
+            <a:ext cx="3068000" cy="223850"/>
           </a:xfrm>
           <a:prstGeom prst="rect">
             <a:avLst/>
@@ -5525,7 +5368,7 @@
         <p:spPr>
           <a:xfrm>
             <a:off x="-1" y="5956648"/>
-            <a:ext cx="9144001" cy="92701"/>
+            <a:ext cx="9144001" cy="92702"/>
           </a:xfrm>
           <a:prstGeom prst="rect">
             <a:avLst/>
@@ -5553,10 +5396,6 @@
                 <a:solidFill>
                   <a:srgbClr val="FFFFFF"/>
                 </a:solidFill>
-                <a:latin typeface="+mn-lt"/>
-                <a:ea typeface="+mn-ea"/>
-                <a:cs typeface="+mn-cs"/>
-                <a:sym typeface="Calibri"/>
               </a:defRPr>
             </a:pPr>
           </a:p>
@@ -5632,7 +5471,7 @@
         <p:spPr>
           <a:xfrm>
             <a:off x="1792288" y="5367337"/>
-            <a:ext cx="5486404" cy="804866"/>
+            <a:ext cx="5486404" cy="804867"/>
           </a:xfrm>
           <a:prstGeom prst="rect">
             <a:avLst/>
@@ -5787,7 +5626,7 @@
         <p:spPr>
           <a:xfrm>
             <a:off x="-1" y="6049340"/>
-            <a:ext cx="9157815" cy="808662"/>
+            <a:ext cx="9157815" cy="808663"/>
           </a:xfrm>
           <a:prstGeom prst="rect">
             <a:avLst/>
@@ -5817,10 +5656,6 @@
                 <a:solidFill>
                   <a:srgbClr val="FFFFFF"/>
                 </a:solidFill>
-                <a:latin typeface="+mn-lt"/>
-                <a:ea typeface="+mn-ea"/>
-                <a:cs typeface="+mn-cs"/>
-                <a:sym typeface="Calibri"/>
               </a:defRPr>
             </a:pPr>
           </a:p>
@@ -5845,7 +5680,7 @@
         <p:spPr>
           <a:xfrm>
             <a:off x="5831904" y="6371261"/>
-            <a:ext cx="3067999" cy="223849"/>
+            <a:ext cx="3068000" cy="223850"/>
           </a:xfrm>
           <a:prstGeom prst="rect">
             <a:avLst/>
@@ -5864,7 +5699,7 @@
         <p:spPr>
           <a:xfrm>
             <a:off x="-1" y="5956648"/>
-            <a:ext cx="9144001" cy="92701"/>
+            <a:ext cx="9144001" cy="92702"/>
           </a:xfrm>
           <a:prstGeom prst="rect">
             <a:avLst/>
@@ -5892,10 +5727,6 @@
                 <a:solidFill>
                   <a:srgbClr val="FFFFFF"/>
                 </a:solidFill>
-                <a:latin typeface="+mn-lt"/>
-                <a:ea typeface="+mn-ea"/>
-                <a:cs typeface="+mn-cs"/>
-                <a:sym typeface="Calibri"/>
               </a:defRPr>
             </a:pPr>
           </a:p>
@@ -6517,7 +6348,7 @@
           <a:sym typeface="Adobe Caslon Pro"/>
         </a:defRPr>
       </a:lvl8pPr>
-      <a:lvl9pPr marL="3018321" marR="0" indent="-274391" algn="l" defTabSz="342991" rtl="0" latinLnBrk="0">
+      <a:lvl9pPr marL="3018320" marR="0" indent="-274391" algn="l" defTabSz="342991" rtl="0" latinLnBrk="0">
         <a:lnSpc>
           <a:spcPct val="100000"/>
         </a:lnSpc>
@@ -6831,10 +6662,6 @@
                 <a:solidFill>
                   <a:srgbClr val="FFFFFF"/>
                 </a:solidFill>
-                <a:latin typeface="+mn-lt"/>
-                <a:ea typeface="+mn-ea"/>
-                <a:cs typeface="+mn-cs"/>
-                <a:sym typeface="Calibri"/>
               </a:defRPr>
             </a:pPr>
           </a:p>
@@ -6851,7 +6678,7 @@
         <p:spPr>
           <a:xfrm>
             <a:off x="626683" y="1502819"/>
-            <a:ext cx="8184809" cy="978700"/>
+            <a:ext cx="8184809" cy="978701"/>
           </a:xfrm>
           <a:prstGeom prst="rect">
             <a:avLst/>
@@ -6887,7 +6714,7 @@
         <p:spPr>
           <a:xfrm>
             <a:off x="626683" y="2397727"/>
-            <a:ext cx="3558235" cy="547977"/>
+            <a:ext cx="3558235" cy="547978"/>
           </a:xfrm>
           <a:prstGeom prst="rect">
             <a:avLst/>
@@ -6935,7 +6762,7 @@
         <p:spPr>
           <a:xfrm>
             <a:off x="6468898" y="4690386"/>
-            <a:ext cx="2016792" cy="1422960"/>
+            <a:ext cx="2016793" cy="1422961"/>
           </a:xfrm>
           <a:prstGeom prst="rect">
             <a:avLst/>
@@ -6953,8 +6780,8 @@
         </p:nvSpPr>
         <p:spPr>
           <a:xfrm>
-            <a:off x="672402" y="4372202"/>
-            <a:ext cx="4131254" cy="1422958"/>
+            <a:off x="672401" y="4372202"/>
+            <a:ext cx="4131255" cy="1422959"/>
           </a:xfrm>
           <a:prstGeom prst="rect">
             <a:avLst/>
@@ -7233,7 +7060,7 @@
         <p:spPr>
           <a:xfrm>
             <a:off x="213474" y="1338867"/>
-            <a:ext cx="8686428" cy="4262712"/>
+            <a:ext cx="8686428" cy="4262713"/>
           </a:xfrm>
           <a:prstGeom prst="rect">
             <a:avLst/>
@@ -7357,7 +7184,7 @@
         <p:spPr>
           <a:xfrm>
             <a:off x="213473" y="1338866"/>
-            <a:ext cx="8686429" cy="4262715"/>
+            <a:ext cx="8686429" cy="4262716"/>
           </a:xfrm>
           <a:prstGeom prst="rect">
             <a:avLst/>
@@ -7515,7 +7342,7 @@
         </p:nvGraphicFramePr>
         <p:xfrm>
           <a:off x="250233" y="1118448"/>
-          <a:ext cx="8612908" cy="4621096"/>
+          <a:ext cx="8612909" cy="4621096"/>
         </p:xfrm>
         <a:graphic xmlns:a="http://schemas.openxmlformats.org/drawingml/2006/main">
           <a:graphicData uri="http://schemas.openxmlformats.org/drawingml/2006/table">
@@ -8792,7 +8619,7 @@
         <p:spPr>
           <a:xfrm>
             <a:off x="213474" y="1338867"/>
-            <a:ext cx="8686428" cy="4262712"/>
+            <a:ext cx="8686428" cy="4262713"/>
           </a:xfrm>
           <a:prstGeom prst="rect">
             <a:avLst/>
@@ -8802,26 +8629,71 @@
           <a:bodyPr/>
           <a:lstStyle/>
           <a:p>
-            <a:pPr marL="241806" indent="-241806" defTabSz="322410">
+            <a:pPr marL="234551" indent="-234551" defTabSz="312737">
               <a:spcBef>
-                <a:spcPts val="400"/>
+                <a:spcPts val="300"/>
               </a:spcBef>
-              <a:defRPr sz="2200"/>
+              <a:defRPr b="1" sz="2134"/>
             </a:pPr>
             <a:r>
-              <a:t>The Pattern:</a:t>
-            </a:r>
-          </a:p>
-          <a:p>
-            <a:pPr lvl="1" marL="564217" indent="-241806" defTabSz="322410">
+              <a:t>Positive/Negative/Neutral </a:t>
+            </a:r>
+            <a:r>
+              <a:rPr b="0"/>
+              <a:t>classification much easier than 1-5 RRP</a:t>
+            </a:r>
+            <a:endParaRPr b="0"/>
+          </a:p>
+          <a:p>
+            <a:pPr lvl="1" marL="547290" indent="-234551" defTabSz="312737">
               <a:spcBef>
-                <a:spcPts val="400"/>
+                <a:spcPts val="300"/>
               </a:spcBef>
               <a:buChar char="•"/>
-              <a:defRPr b="1" sz="2200"/>
+              <a:defRPr b="1" sz="2134"/>
             </a:pPr>
             <a:r>
-              <a:t>Positive vs Negative</a:t>
+              <a:rPr b="0"/>
+              <a:t>Approx. 20% higher accuracy (matches expectation from literature)</a:t>
+            </a:r>
+            <a:endParaRPr b="0"/>
+          </a:p>
+          <a:p>
+            <a:pPr lvl="1" marL="547290" indent="-234551" defTabSz="312737">
+              <a:spcBef>
+                <a:spcPts val="300"/>
+              </a:spcBef>
+              <a:buChar char="•"/>
+              <a:defRPr sz="2134"/>
+            </a:pPr>
+            <a:r>
+              <a:t>The model can identify </a:t>
+            </a:r>
+            <a:r>
+              <a:rPr b="1"/>
+              <a:t>polarity</a:t>
+            </a:r>
+            <a:r>
+              <a:t>, but it struggles to map </a:t>
+            </a:r>
+            <a:r>
+              <a:rPr b="1"/>
+              <a:t>polarity → precise star rating </a:t>
+            </a:r>
+            <a:r>
+              <a:t>(problem isn’t sentiment detection, it’s rating calibration).</a:t>
+            </a:r>
+          </a:p>
+          <a:p>
+            <a:pPr marL="234551" indent="-234551" defTabSz="312737">
+              <a:spcBef>
+                <a:spcPts val="300"/>
+              </a:spcBef>
+              <a:defRPr b="1" sz="2134"/>
+            </a:pPr>
+            <a:r>
+              <a:rPr b="0"/>
+              <a:t>Positive vs negative</a:t>
             </a:r>
             <a:r>
               <a:rPr b="0"/>
@@ -8833,16 +8705,36 @@
             </a:r>
             <a:r>
               <a:rPr b="0"/>
-              <a:t> to separate (97% accuracy when we took out 3 star ratings). </a:t>
-            </a:r>
-          </a:p>
-          <a:p>
-            <a:pPr lvl="1" marL="564217" indent="-241806" defTabSz="322410">
+              <a:t> to separate (97% accuracy when we took out 3 star ratings)</a:t>
+            </a:r>
+            <a:endParaRPr b="0"/>
+          </a:p>
+          <a:p>
+            <a:pPr marL="234551" indent="-234551" defTabSz="312737">
               <a:spcBef>
-                <a:spcPts val="400"/>
+                <a:spcPts val="300"/>
+              </a:spcBef>
+              <a:defRPr sz="2134"/>
+            </a:pPr>
+            <a:r>
+              <a:t>The multi-class (1–5) setup suffers because 3-star reviews </a:t>
+            </a:r>
+            <a:r>
+              <a:rPr b="1"/>
+              <a:t>blur the boundaries</a:t>
+            </a:r>
+            <a:r>
+              <a:t>.</a:t>
+            </a:r>
+            <a:endParaRPr b="1"/>
+          </a:p>
+          <a:p>
+            <a:pPr lvl="1" marL="547290" indent="-234551" defTabSz="312737">
+              <a:spcBef>
+                <a:spcPts val="300"/>
               </a:spcBef>
               <a:buChar char="•"/>
-              <a:defRPr b="1" sz="2200"/>
+              <a:defRPr b="1" sz="2134"/>
             </a:pPr>
             <a:r>
               <a:t>Neutral (3-star)</a:t>
@@ -8852,46 +8744,12 @@
               <a:t> reviews are </a:t>
             </a:r>
             <a:r>
-              <a:rPr b="0" i="1"/>
+              <a:rPr i="1"/>
               <a:t>ambiguous</a:t>
             </a:r>
             <a:r>
               <a:rPr b="0"/>
               <a:t> — they overlap lexically and sentiment-wise with both extremes. </a:t>
-            </a:r>
-          </a:p>
-          <a:p>
-            <a:pPr lvl="1" marL="564217" indent="-241806" defTabSz="322410">
-              <a:spcBef>
-                <a:spcPts val="400"/>
-              </a:spcBef>
-              <a:buChar char="•"/>
-              <a:defRPr sz="2200"/>
-            </a:pPr>
-            <a:r>
-              <a:t>The multi-class (1–5) setup suffers because 3-star reviews blur the boundaries. </a:t>
-            </a:r>
-          </a:p>
-          <a:p>
-            <a:pPr marL="241806" indent="-241806" defTabSz="322410">
-              <a:spcBef>
-                <a:spcPts val="400"/>
-              </a:spcBef>
-              <a:defRPr sz="2200"/>
-            </a:pPr>
-            <a:r>
-              <a:t>The model can almost perfectly identify polarity, but it struggles to map polarity → precise star rating. </a:t>
-            </a:r>
-          </a:p>
-          <a:p>
-            <a:pPr marL="241806" indent="-241806" defTabSz="322410">
-              <a:spcBef>
-                <a:spcPts val="400"/>
-              </a:spcBef>
-              <a:defRPr sz="2200"/>
-            </a:pPr>
-            <a:r>
-              <a:t>This means the information bottleneck isn’t “sentiment detection” — it’s “rating calibration.”</a:t>
             </a:r>
           </a:p>
         </p:txBody>
@@ -8924,17 +8782,13 @@
       </p:grpSpPr>
       <p:sp>
         <p:nvSpPr>
-          <p:cNvPr id="279" name="Experimental Tests"/>
+          <p:cNvPr id="279" name="Idea: Layered Classifier"/>
           <p:cNvSpPr txBox="1"/>
           <p:nvPr>
             <p:ph type="title"/>
           </p:nvPr>
         </p:nvSpPr>
         <p:spPr>
-          <a:xfrm>
-            <a:off x="213474" y="341767"/>
-            <a:ext cx="8686428" cy="878970"/>
-          </a:xfrm>
           <a:prstGeom prst="rect">
             <a:avLst/>
           </a:prstGeom>
@@ -8945,23 +8799,23 @@
           <a:p>
             <a:pPr/>
             <a:r>
-              <a:t>Experimental Tests</a:t>
+              <a:t>Idea: Layered Classifier</a:t>
             </a:r>
           </a:p>
         </p:txBody>
       </p:sp>
       <p:sp>
         <p:nvSpPr>
-          <p:cNvPr id="280" name="Layered/Hierarchical classifier…"/>
+          <p:cNvPr id="280" name="TF-IDF with n-grams (1,2)…"/>
           <p:cNvSpPr txBox="1"/>
           <p:nvPr>
-            <p:ph type="body" idx="1"/>
+            <p:ph type="body" sz="half" idx="1"/>
           </p:nvPr>
         </p:nvSpPr>
         <p:spPr>
           <a:xfrm>
-            <a:off x="213473" y="940453"/>
-            <a:ext cx="5458001" cy="4661127"/>
+            <a:off x="2754203" y="1144510"/>
+            <a:ext cx="3635594" cy="4457069"/>
           </a:xfrm>
           <a:prstGeom prst="rect">
             <a:avLst/>
@@ -8971,193 +8825,103 @@
           <a:bodyPr/>
           <a:lstStyle/>
           <a:p>
-            <a:pPr marL="179671" indent="-179671" defTabSz="192073">
+            <a:pPr marL="187786" indent="-187786" defTabSz="250383">
               <a:spcBef>
-                <a:spcPts val="200"/>
+                <a:spcPts val="300"/>
               </a:spcBef>
-              <a:buFontTx/>
-              <a:buAutoNum type="arabicPeriod" startAt="1"/>
-              <a:defRPr b="1" sz="1300"/>
+              <a:defRPr sz="1752"/>
             </a:pPr>
             <a:r>
-              <a:t>Layered/Hierarchical classifier</a:t>
-            </a:r>
-          </a:p>
-          <a:p>
-            <a:pPr lvl="1" marL="348113" indent="-134753" defTabSz="192073">
+              <a:rPr b="1"/>
+              <a:t>TF-IDF</a:t>
+            </a:r>
+            <a:r>
+              <a:t> with n-grams (1,2) </a:t>
+            </a:r>
+          </a:p>
+          <a:p>
+            <a:pPr marL="187786" indent="-187786" defTabSz="250383">
               <a:spcBef>
-                <a:spcPts val="200"/>
+                <a:spcPts val="300"/>
               </a:spcBef>
-              <a:buFontTx/>
-              <a:buChar char="•"/>
-              <a:defRPr sz="1300"/>
+              <a:defRPr sz="1752"/>
             </a:pPr>
             <a:r>
-              <a:t>TF-IDF + n-grams with Logistic Regression</a:t>
-            </a:r>
-          </a:p>
-          <a:p>
-            <a:pPr lvl="1" marL="336128" indent="-144055" defTabSz="192073">
+              <a:rPr b="1"/>
+              <a:t>Logistic Regression</a:t>
+            </a:r>
+            <a:r>
+              <a:t> at both levels</a:t>
+            </a:r>
+          </a:p>
+          <a:p>
+            <a:pPr marL="187786" indent="-187786" defTabSz="250383">
               <a:spcBef>
-                <a:spcPts val="200"/>
+                <a:spcPts val="300"/>
+              </a:spcBef>
+              <a:defRPr sz="1752"/>
+            </a:pPr>
+            <a:r>
+              <a:t>First iteration accuracy almost the exact same as baseline (Logistic Regression w/ TF-IDF)</a:t>
+            </a:r>
+          </a:p>
+          <a:p>
+            <a:pPr lvl="1" marL="438169" indent="-187786" defTabSz="250383">
+              <a:spcBef>
+                <a:spcPts val="300"/>
               </a:spcBef>
               <a:buChar char="•"/>
-              <a:defRPr sz="1300"/>
+              <a:defRPr b="1" sz="1752"/>
             </a:pPr>
             <a:r>
-              <a:t>Stage 1: Sentiment classification (negative/neutral/positive)</a:t>
-            </a:r>
-          </a:p>
-          <a:p>
-            <a:pPr lvl="1" marL="336128" indent="-144055" defTabSz="192073">
+              <a:t>Cascading errors for 3 star classification</a:t>
+            </a:r>
+          </a:p>
+          <a:p>
+            <a:pPr marL="187786" indent="-187786" defTabSz="250383">
               <a:spcBef>
-                <a:spcPts val="200"/>
+                <a:spcPts val="300"/>
+              </a:spcBef>
+              <a:defRPr sz="1752"/>
+            </a:pPr>
+            <a:r>
+              <a:t>Current iteration 1% better (than baseline LR), and we think can be improved further.</a:t>
+            </a:r>
+          </a:p>
+          <a:p>
+            <a:pPr lvl="1" marL="438169" indent="-187786" defTabSz="250383">
+              <a:spcBef>
+                <a:spcPts val="300"/>
               </a:spcBef>
               <a:buChar char="•"/>
-              <a:defRPr sz="1300"/>
+              <a:defRPr sz="1752"/>
             </a:pPr>
             <a:r>
-              <a:t>Stage 2a: Negative reviews → 1 vs 2 stars</a:t>
-            </a:r>
-          </a:p>
-          <a:p>
-            <a:pPr lvl="1" marL="336128" indent="-144055" defTabSz="192073">
+              <a:t>Hyperparameter tuning</a:t>
+            </a:r>
+          </a:p>
+          <a:p>
+            <a:pPr lvl="1" marL="438169" indent="-187786" defTabSz="250383">
               <a:spcBef>
-                <a:spcPts val="200"/>
+                <a:spcPts val="300"/>
               </a:spcBef>
               <a:buChar char="•"/>
-              <a:defRPr sz="1300"/>
+              <a:defRPr sz="1752"/>
             </a:pPr>
             <a:r>
-              <a:t>Stage 2b: Positive reviews → 4 vs 5 stars</a:t>
-            </a:r>
-          </a:p>
-          <a:p>
-            <a:pPr lvl="1" marL="336128" indent="-144055" defTabSz="192073">
+              <a:t>Soft-er routing (probabilities)</a:t>
+            </a:r>
+          </a:p>
+          <a:p>
+            <a:pPr lvl="1" marL="438169" indent="-187786" defTabSz="250383">
               <a:spcBef>
-                <a:spcPts val="200"/>
+                <a:spcPts val="300"/>
               </a:spcBef>
               <a:buChar char="•"/>
-              <a:defRPr sz="1300"/>
+              <a:defRPr sz="1752"/>
             </a:pPr>
             <a:r>
-              <a:t>Neutral reviews → automatically assigned 3 stars</a:t>
-            </a:r>
-          </a:p>
-          <a:p>
-            <a:pPr lvl="1" marL="336128" indent="-144055" defTabSz="192073">
-              <a:spcBef>
-                <a:spcPts val="200"/>
-              </a:spcBef>
-              <a:buChar char="•"/>
-              <a:defRPr sz="1300"/>
-            </a:pPr>
-            <a:r>
-              <a:t>Slightly better than baseline in some classes, worse in others, but limited improvement overall (&lt; 0.02%)</a:t>
-            </a:r>
-          </a:p>
-          <a:p>
-            <a:pPr marL="179671" indent="-179671" defTabSz="192073">
-              <a:spcBef>
-                <a:spcPts val="200"/>
-              </a:spcBef>
-              <a:buFontTx/>
-              <a:buAutoNum type="arabicPeriod" startAt="1"/>
-              <a:defRPr b="1" sz="1300"/>
-            </a:pPr>
-            <a:r>
-              <a:t>Layered classifier with soft probabilities</a:t>
-            </a:r>
-          </a:p>
-          <a:p>
-            <a:pPr lvl="1" marL="348113" indent="-134753" defTabSz="192073">
-              <a:spcBef>
-                <a:spcPts val="200"/>
-              </a:spcBef>
-              <a:buFontTx/>
-              <a:buChar char="•"/>
-              <a:defRPr sz="1300"/>
-            </a:pPr>
-            <a:r>
-              <a:t>Passing probabilities from layer 1 classifier </a:t>
-            </a:r>
-          </a:p>
-          <a:p>
-            <a:pPr lvl="1" marL="348113" indent="-134753" defTabSz="192073">
-              <a:spcBef>
-                <a:spcPts val="200"/>
-              </a:spcBef>
-              <a:buFontTx/>
-              <a:buChar char="•"/>
-              <a:defRPr sz="1300"/>
-            </a:pPr>
-            <a:r>
-              <a:t>Used pre-trained sentence embeddings (s-BERT) instead of TF-IDF</a:t>
-            </a:r>
-          </a:p>
-          <a:p>
-            <a:pPr lvl="1" marL="348113" indent="-134753" defTabSz="192073">
-              <a:spcBef>
-                <a:spcPts val="200"/>
-              </a:spcBef>
-              <a:buFontTx/>
-              <a:buChar char="•"/>
-              <a:defRPr sz="1300"/>
-            </a:pPr>
-            <a:r>
-              <a:t>Worse accuracy for binary (layer 1) classifier than baseline</a:t>
-            </a:r>
-          </a:p>
-          <a:p>
-            <a:pPr lvl="1" marL="348113" indent="-134753" defTabSz="192073">
-              <a:spcBef>
-                <a:spcPts val="200"/>
-              </a:spcBef>
-              <a:buFontTx/>
-              <a:buChar char="•"/>
-              <a:defRPr sz="1300"/>
-            </a:pPr>
-            <a:r>
-              <a:t>Layer 2 classifier ended up predicting dominant class (5-star) for every rating</a:t>
-            </a:r>
-          </a:p>
-          <a:p>
-            <a:pPr marL="179671" indent="-179671" defTabSz="192073">
-              <a:spcBef>
-                <a:spcPts val="200"/>
-              </a:spcBef>
-              <a:buFontTx/>
-              <a:buAutoNum type="arabicPeriod" startAt="1"/>
-              <a:defRPr b="1" sz="1300"/>
-            </a:pPr>
-            <a:r>
-              <a:t>Simple MLP with sBERT</a:t>
-            </a:r>
-          </a:p>
-          <a:p>
-            <a:pPr lvl="1" marL="348113" indent="-134753" defTabSz="192073">
-              <a:spcBef>
-                <a:spcPts val="200"/>
-              </a:spcBef>
-              <a:buFontTx/>
-              <a:buChar char="•"/>
-              <a:defRPr sz="1300"/>
-            </a:pPr>
-            <a:r>
-              <a:t>Adam optimizer, 100 epochs, 1 hidden layer (128), ReLU activation, batch size = 64 </a:t>
-            </a:r>
-          </a:p>
-          <a:p>
-            <a:pPr lvl="1" marL="348113" indent="-134753" defTabSz="192073">
-              <a:spcBef>
-                <a:spcPts val="200"/>
-              </a:spcBef>
-              <a:buFontTx/>
-              <a:buChar char="•"/>
-              <a:defRPr sz="1300"/>
-            </a:pPr>
-            <a:r>
-              <a:t>62% test accuracy</a:t>
+              <a:t>Trying different models at layer 2 (i.e. regressor)</a:t>
             </a:r>
           </a:p>
         </p:txBody>
@@ -9180,8 +8944,8 @@
         </p:blipFill>
         <p:spPr>
           <a:xfrm>
-            <a:off x="6170588" y="242378"/>
-            <a:ext cx="2390629" cy="3330941"/>
+            <a:off x="158492" y="1272326"/>
+            <a:ext cx="2445936" cy="3408001"/>
           </a:xfrm>
           <a:prstGeom prst="rect">
             <a:avLst/>
@@ -9193,7 +8957,7 @@
       </p:pic>
       <p:pic>
         <p:nvPicPr>
-          <p:cNvPr id="282" name="Screenshot 2025-11-09 at 2.17.41 PM.png" descr="Screenshot 2025-11-09 at 2.17.41 PM.png"/>
+          <p:cNvPr id="282" name="Screenshot 2025-11-13 at 10.00.53 AM.png" descr="Screenshot 2025-11-13 at 10.00.53 AM.png"/>
           <p:cNvPicPr>
             <a:picLocks noChangeAspect="1"/>
           </p:cNvPicPr>
@@ -9209,8 +8973,8 @@
         </p:blipFill>
         <p:spPr>
           <a:xfrm>
-            <a:off x="5717613" y="3716442"/>
-            <a:ext cx="3296580" cy="2097083"/>
+            <a:off x="6539572" y="1096242"/>
+            <a:ext cx="2445936" cy="3760169"/>
           </a:xfrm>
           <a:prstGeom prst="rect">
             <a:avLst/>
@@ -9220,6 +8984,86 @@
           </a:ln>
         </p:spPr>
       </p:pic>
+      <p:sp>
+        <p:nvSpPr>
+          <p:cNvPr id="283" name="First Test Iteration"/>
+          <p:cNvSpPr txBox="1"/>
+          <p:nvPr/>
+        </p:nvSpPr>
+        <p:spPr>
+          <a:xfrm>
+            <a:off x="617900" y="4731916"/>
+            <a:ext cx="1527120" cy="277993"/>
+          </a:xfrm>
+          <a:prstGeom prst="rect">
+            <a:avLst/>
+          </a:prstGeom>
+          <a:ln w="12700">
+            <a:miter lim="400000"/>
+          </a:ln>
+          <a:extLst>
+            <a:ext uri="{C572A759-6A51-4108-AA02-DFA0A04FC94B}">
+              <ma14:wrappingTextBoxFlag xmlns:ma14="http://schemas.microsoft.com/office/mac/drawingml/2011/main" val="1"/>
+            </a:ext>
+          </a:extLst>
+        </p:spPr>
+        <p:txBody>
+          <a:bodyPr wrap="none" lIns="45718" tIns="45718" rIns="45718" bIns="45718">
+            <a:spAutoFit/>
+          </a:bodyPr>
+          <a:lstStyle>
+            <a:lvl1pPr>
+              <a:defRPr b="1" sz="1500"/>
+            </a:lvl1pPr>
+          </a:lstStyle>
+          <a:p>
+            <a:pPr/>
+            <a:r>
+              <a:t>First Test Iteration</a:t>
+            </a:r>
+          </a:p>
+        </p:txBody>
+      </p:sp>
+      <p:sp>
+        <p:nvSpPr>
+          <p:cNvPr id="284" name="Current Architecture"/>
+          <p:cNvSpPr txBox="1"/>
+          <p:nvPr/>
+        </p:nvSpPr>
+        <p:spPr>
+          <a:xfrm>
+            <a:off x="6998980" y="4731916"/>
+            <a:ext cx="1724224" cy="277993"/>
+          </a:xfrm>
+          <a:prstGeom prst="rect">
+            <a:avLst/>
+          </a:prstGeom>
+          <a:ln w="12700">
+            <a:miter lim="400000"/>
+          </a:ln>
+          <a:extLst>
+            <a:ext uri="{C572A759-6A51-4108-AA02-DFA0A04FC94B}">
+              <ma14:wrappingTextBoxFlag xmlns:ma14="http://schemas.microsoft.com/office/mac/drawingml/2011/main" val="1"/>
+            </a:ext>
+          </a:extLst>
+        </p:spPr>
+        <p:txBody>
+          <a:bodyPr wrap="none" lIns="45718" tIns="45718" rIns="45718" bIns="45718">
+            <a:spAutoFit/>
+          </a:bodyPr>
+          <a:lstStyle>
+            <a:lvl1pPr>
+              <a:defRPr b="1" sz="1500"/>
+            </a:lvl1pPr>
+          </a:lstStyle>
+          <a:p>
+            <a:pPr/>
+            <a:r>
+              <a:t>Current Architecture</a:t>
+            </a:r>
+          </a:p>
+        </p:txBody>
+      </p:sp>
     </p:spTree>
   </p:cSld>
   <p:clrMapOvr>
@@ -9246,140 +9090,30 @@
           <a:chExt cx="0" cy="0"/>
         </a:xfrm>
       </p:grpSpPr>
-      <p:sp>
-        <p:nvSpPr>
-          <p:cNvPr id="284" name="Our Proposal"/>
-          <p:cNvSpPr txBox="1"/>
-          <p:nvPr>
-            <p:ph type="title"/>
-          </p:nvPr>
-        </p:nvSpPr>
-        <p:spPr>
-          <a:xfrm>
-            <a:off x="213474" y="341767"/>
-            <a:ext cx="8686428" cy="878970"/>
-          </a:xfrm>
-          <a:prstGeom prst="rect">
-            <a:avLst/>
-          </a:prstGeom>
-        </p:spPr>
-        <p:txBody>
-          <a:bodyPr/>
-          <a:lstStyle/>
-          <a:p>
-            <a:pPr/>
-            <a:r>
-              <a:t>Our Proposal</a:t>
-            </a:r>
-          </a:p>
-        </p:txBody>
-      </p:sp>
-      <p:sp>
-        <p:nvSpPr>
-          <p:cNvPr id="285" name="Best test accuracies:…"/>
-          <p:cNvSpPr txBox="1"/>
-          <p:nvPr>
-            <p:ph type="body" idx="1"/>
-          </p:nvPr>
-        </p:nvSpPr>
-        <p:spPr>
-          <a:xfrm>
-            <a:off x="213474" y="1338867"/>
-            <a:ext cx="8686428" cy="4262712"/>
-          </a:xfrm>
-          <a:prstGeom prst="rect">
-            <a:avLst/>
-          </a:prstGeom>
-        </p:spPr>
-        <p:txBody>
-          <a:bodyPr/>
-          <a:lstStyle/>
-          <a:p>
-            <a:pPr/>
-            <a:r>
-              <a:t>Best test accuracies:</a:t>
-            </a:r>
-          </a:p>
-          <a:p>
-            <a:pPr lvl="1" marL="600232" indent="-257242">
-              <a:buChar char="•"/>
-            </a:pPr>
-            <a:r>
-              <a:t>Logistic Regression (Classifier) w/ TF-IDF &amp; n-grams =&gt; 67%</a:t>
-            </a:r>
-          </a:p>
-          <a:p>
-            <a:pPr lvl="1" marL="600232" indent="-257242">
-              <a:buChar char="•"/>
-            </a:pPr>
-            <a:r>
-              <a:t>Linear Regression (Regressor) w/ TF-IDF &amp; n-grams =&gt; 68% (rounding up to nearest star)</a:t>
-            </a:r>
-          </a:p>
-          <a:p>
-            <a:pPr/>
-            <a:r>
-              <a:t>These accuracies are already 5-7 percentage points better than all of the papers we read (we trained on more data than papers).</a:t>
-            </a:r>
-          </a:p>
-          <a:p>
-            <a:pPr/>
-            <a:r>
-              <a:t>We can potentially improve these results even more with hyperparameter tuning.</a:t>
-            </a:r>
-          </a:p>
-        </p:txBody>
-      </p:sp>
-    </p:spTree>
-  </p:cSld>
-  <p:clrMapOvr>
-    <a:masterClrMapping/>
-  </p:clrMapOvr>
-  <p:transition xmlns:p14="http://schemas.microsoft.com/office/powerpoint/2010/main" spd="med" advClick="1"/>
-</p:sld>
-</file>
-
-<file path=ppt/slides/slide9.xml><?xml version="1.0" encoding="utf-8"?>
-<p:sld xmlns:a="http://schemas.openxmlformats.org/drawingml/2006/main" xmlns:r="http://schemas.openxmlformats.org/officeDocument/2006/relationships" xmlns:p="http://schemas.openxmlformats.org/presentationml/2006/main" xmlns:m="http://schemas.openxmlformats.org/officeDocument/2006/math" xmlns:a14="http://schemas.microsoft.com/office/drawing/2010/main" showMasterSp="1" showMasterPhAnim="1">
-  <p:cSld>
-    <p:spTree>
-      <p:nvGrpSpPr>
-        <p:cNvPr id="1" name=""/>
-        <p:cNvGrpSpPr/>
-        <p:nvPr/>
-      </p:nvGrpSpPr>
-      <p:grpSpPr>
-        <a:xfrm>
-          <a:off x="0" y="0"/>
-          <a:ext cx="0" cy="0"/>
-          <a:chOff x="0" y="0"/>
-          <a:chExt cx="0" cy="0"/>
-        </a:xfrm>
-      </p:grpSpPr>
       <p:grpSp>
         <p:nvGrpSpPr>
-          <p:cNvPr id="289" name="Rounded Rectangle 3"/>
+          <p:cNvPr id="288" name="Rounded Rectangle 3"/>
           <p:cNvGrpSpPr/>
           <p:nvPr/>
         </p:nvGrpSpPr>
         <p:grpSpPr>
           <a:xfrm>
-            <a:off x="237725" y="950106"/>
-            <a:ext cx="1481347" cy="280800"/>
+            <a:off x="237725" y="950105"/>
+            <a:ext cx="1481348" cy="280798"/>
             <a:chOff x="0" y="0"/>
-            <a:chExt cx="1481345" cy="280798"/>
+            <a:chExt cx="1481347" cy="280796"/>
           </a:xfrm>
         </p:grpSpPr>
         <p:sp>
           <p:nvSpPr>
-            <p:cNvPr id="287" name="Rounded Rectangle"/>
+            <p:cNvPr id="286" name="Rounded Rectangle"/>
             <p:cNvSpPr/>
             <p:nvPr/>
           </p:nvSpPr>
           <p:spPr>
             <a:xfrm>
               <a:off x="0" y="35243"/>
-              <a:ext cx="1481346" cy="210313"/>
+              <a:ext cx="1481348" cy="210315"/>
             </a:xfrm>
             <a:prstGeom prst="roundRect">
               <a:avLst>
@@ -9401,27 +9135,20 @@
             </a:bodyPr>
             <a:lstStyle/>
             <a:p>
-              <a:pPr algn="ctr">
-                <a:defRPr>
-                  <a:latin typeface="+mn-lt"/>
-                  <a:ea typeface="+mn-ea"/>
-                  <a:cs typeface="+mn-cs"/>
-                  <a:sym typeface="Calibri"/>
-                </a:defRPr>
-              </a:pPr>
+              <a:pPr algn="ctr"/>
             </a:p>
           </p:txBody>
         </p:sp>
         <p:sp>
           <p:nvSpPr>
-            <p:cNvPr id="288" name="Phase 1"/>
+            <p:cNvPr id="287" name="Phase 1"/>
             <p:cNvSpPr txBox="1"/>
             <p:nvPr/>
           </p:nvSpPr>
           <p:spPr>
             <a:xfrm>
               <a:off x="55986" y="0"/>
-              <a:ext cx="1369373" cy="280799"/>
+              <a:ext cx="1369375" cy="280797"/>
             </a:xfrm>
             <a:prstGeom prst="rect">
               <a:avLst/>
@@ -9439,17 +9166,12 @@
             </a:extLst>
           </p:spPr>
           <p:txBody>
-            <a:bodyPr wrap="square" lIns="45719" tIns="45719" rIns="45719" bIns="45719" numCol="1" anchor="ctr">
+            <a:bodyPr wrap="square" lIns="45718" tIns="45718" rIns="45718" bIns="45718" numCol="1" anchor="ctr">
               <a:spAutoFit/>
             </a:bodyPr>
             <a:lstStyle>
               <a:lvl1pPr algn="ctr">
-                <a:defRPr b="1" sz="1400">
-                  <a:latin typeface="+mn-lt"/>
-                  <a:ea typeface="+mn-ea"/>
-                  <a:cs typeface="+mn-cs"/>
-                  <a:sym typeface="Calibri"/>
-                </a:defRPr>
+                <a:defRPr b="1" sz="1400"/>
               </a:lvl1pPr>
             </a:lstStyle>
             <a:p>
@@ -9463,28 +9185,28 @@
       </p:grpSp>
       <p:grpSp>
         <p:nvGrpSpPr>
-          <p:cNvPr id="292" name="Rounded Rectangle 4"/>
+          <p:cNvPr id="291" name="Rounded Rectangle 4"/>
           <p:cNvGrpSpPr/>
           <p:nvPr/>
         </p:nvGrpSpPr>
         <p:grpSpPr>
           <a:xfrm>
-            <a:off x="1719072" y="1593590"/>
-            <a:ext cx="3411038" cy="280800"/>
+            <a:off x="1719071" y="1593590"/>
+            <a:ext cx="3411041" cy="280798"/>
             <a:chOff x="0" y="0"/>
-            <a:chExt cx="3411037" cy="280798"/>
+            <a:chExt cx="3411039" cy="280796"/>
           </a:xfrm>
         </p:grpSpPr>
         <p:sp>
           <p:nvSpPr>
-            <p:cNvPr id="290" name="Rounded Rectangle"/>
+            <p:cNvPr id="289" name="Rounded Rectangle"/>
             <p:cNvSpPr/>
             <p:nvPr/>
           </p:nvSpPr>
           <p:spPr>
             <a:xfrm>
-              <a:off x="0" y="35243"/>
-              <a:ext cx="3411038" cy="210313"/>
+              <a:off x="-1" y="35243"/>
+              <a:ext cx="3411040" cy="210315"/>
             </a:xfrm>
             <a:prstGeom prst="roundRect">
               <a:avLst>
@@ -9506,27 +9228,20 @@
             </a:bodyPr>
             <a:lstStyle/>
             <a:p>
-              <a:pPr algn="ctr">
-                <a:defRPr>
-                  <a:latin typeface="+mn-lt"/>
-                  <a:ea typeface="+mn-ea"/>
-                  <a:cs typeface="+mn-cs"/>
-                  <a:sym typeface="Calibri"/>
-                </a:defRPr>
-              </a:pPr>
+              <a:pPr algn="ctr"/>
             </a:p>
           </p:txBody>
         </p:sp>
         <p:sp>
           <p:nvSpPr>
-            <p:cNvPr id="291" name="Phase 2"/>
+            <p:cNvPr id="290" name="Phase 2"/>
             <p:cNvSpPr txBox="1"/>
             <p:nvPr/>
           </p:nvSpPr>
           <p:spPr>
             <a:xfrm>
-              <a:off x="55986" y="0"/>
-              <a:ext cx="3299065" cy="280799"/>
+              <a:off x="55985" y="0"/>
+              <a:ext cx="3299067" cy="280797"/>
             </a:xfrm>
             <a:prstGeom prst="rect">
               <a:avLst/>
@@ -9544,17 +9259,12 @@
             </a:extLst>
           </p:spPr>
           <p:txBody>
-            <a:bodyPr wrap="square" lIns="45719" tIns="45719" rIns="45719" bIns="45719" numCol="1" anchor="ctr">
+            <a:bodyPr wrap="square" lIns="45718" tIns="45718" rIns="45718" bIns="45718" numCol="1" anchor="ctr">
               <a:spAutoFit/>
             </a:bodyPr>
             <a:lstStyle>
               <a:lvl1pPr algn="ctr">
-                <a:defRPr b="1" sz="1400">
-                  <a:latin typeface="+mn-lt"/>
-                  <a:ea typeface="+mn-ea"/>
-                  <a:cs typeface="+mn-cs"/>
-                  <a:sym typeface="Calibri"/>
-                </a:defRPr>
+                <a:defRPr b="1" sz="1400"/>
               </a:lvl1pPr>
             </a:lstStyle>
             <a:p>
@@ -9568,13 +9278,13 @@
       </p:grpSp>
       <p:graphicFrame>
         <p:nvGraphicFramePr>
-          <p:cNvPr id="293" name="Table 6"/>
+          <p:cNvPr id="292" name="Table 6"/>
           <p:cNvGraphicFramePr/>
           <p:nvPr/>
         </p:nvGraphicFramePr>
         <p:xfrm>
           <a:off x="182879" y="1222434"/>
-          <a:ext cx="1536192" cy="406401"/>
+          <a:ext cx="1536192" cy="406402"/>
         </p:xfrm>
         <a:graphic xmlns:a="http://schemas.openxmlformats.org/drawingml/2006/main">
           <a:graphicData uri="http://schemas.openxmlformats.org/drawingml/2006/table">
@@ -9665,13 +9375,13 @@
       </p:graphicFrame>
       <p:graphicFrame>
         <p:nvGraphicFramePr>
-          <p:cNvPr id="294" name="Table 7"/>
+          <p:cNvPr id="293" name="Table 7"/>
           <p:cNvGraphicFramePr/>
           <p:nvPr/>
         </p:nvGraphicFramePr>
         <p:xfrm>
-          <a:off x="1719071" y="1940924"/>
-          <a:ext cx="3455471" cy="1422745"/>
+          <a:off x="1719071" y="1940923"/>
+          <a:ext cx="3455471" cy="1422747"/>
         </p:xfrm>
         <a:graphic xmlns:a="http://schemas.openxmlformats.org/drawingml/2006/main">
           <a:graphicData uri="http://schemas.openxmlformats.org/drawingml/2006/table">
@@ -10045,13 +9755,13 @@
       </p:graphicFrame>
       <p:graphicFrame>
         <p:nvGraphicFramePr>
-          <p:cNvPr id="295" name="Table 8"/>
+          <p:cNvPr id="294" name="Table 8"/>
           <p:cNvGraphicFramePr/>
           <p:nvPr/>
         </p:nvGraphicFramePr>
         <p:xfrm>
           <a:off x="5248261" y="3429000"/>
-          <a:ext cx="3712858" cy="1911331"/>
+          <a:ext cx="3712858" cy="1911332"/>
         </p:xfrm>
         <a:graphic xmlns:a="http://schemas.openxmlformats.org/drawingml/2006/main">
           <a:graphicData uri="http://schemas.openxmlformats.org/drawingml/2006/table">
@@ -10165,17 +9875,28 @@
                     <a:lstStyle/>
                     <a:p>
                       <a:pPr defTabSz="342991">
-                        <a:defRPr sz="1800"/>
-                      </a:pPr>
-                      <a:r>
-                        <a:rPr sz="1000">
+                        <a:defRPr sz="1000">
                           <a:latin typeface="+mn-lt"/>
                           <a:ea typeface="+mn-ea"/>
                           <a:cs typeface="+mn-cs"/>
                           <a:sym typeface="Calibri"/>
-                        </a:rPr>
-                        <a:t>Layered classifier 
-+ soft routing</a:t>
+                        </a:defRPr>
+                      </a:pPr>
+                      <a:r>
+                        <a:t>Layered classifier </a:t>
+                      </a:r>
+                    </a:p>
+                    <a:p>
+                      <a:pPr defTabSz="342991">
+                        <a:defRPr sz="1000">
+                          <a:latin typeface="+mn-lt"/>
+                          <a:ea typeface="+mn-ea"/>
+                          <a:cs typeface="+mn-cs"/>
+                          <a:sym typeface="Calibri"/>
+                        </a:defRPr>
+                      </a:pPr>
+                      <a:r>
+                        <a:t>+ soft routing</a:t>
                       </a:r>
                     </a:p>
                   </a:txBody>
@@ -10378,12 +10099,9 @@
                     <a:bodyPr/>
                     <a:lstStyle/>
                     <a:p>
-                      <a:pPr defTabSz="342991">
-                        <a:defRPr sz="1300">
-                          <a:latin typeface="+mn-lt"/>
-                          <a:ea typeface="+mn-ea"/>
-                          <a:cs typeface="+mn-cs"/>
-                          <a:sym typeface="Calibri"/>
+                      <a:pPr>
+                        <a:defRPr>
+                          <a:sym typeface="Helvetica"/>
                         </a:defRPr>
                       </a:pPr>
                     </a:p>
@@ -10564,28 +10282,28 @@
       </p:graphicFrame>
       <p:grpSp>
         <p:nvGrpSpPr>
-          <p:cNvPr id="298" name="Rounded Rectangle 5"/>
+          <p:cNvPr id="297" name="Rounded Rectangle 5"/>
           <p:cNvGrpSpPr/>
           <p:nvPr/>
         </p:nvGrpSpPr>
         <p:grpSpPr>
           <a:xfrm>
-            <a:off x="5248261" y="3040047"/>
-            <a:ext cx="3712858" cy="280800"/>
+            <a:off x="5248261" y="3040046"/>
+            <a:ext cx="3712859" cy="280798"/>
             <a:chOff x="0" y="0"/>
-            <a:chExt cx="3712857" cy="280798"/>
+            <a:chExt cx="3712858" cy="280796"/>
           </a:xfrm>
         </p:grpSpPr>
         <p:sp>
           <p:nvSpPr>
-            <p:cNvPr id="296" name="Rounded Rectangle"/>
+            <p:cNvPr id="295" name="Rounded Rectangle"/>
             <p:cNvSpPr/>
             <p:nvPr/>
           </p:nvSpPr>
           <p:spPr>
             <a:xfrm>
               <a:off x="0" y="34332"/>
-              <a:ext cx="3712858" cy="212135"/>
+              <a:ext cx="3712859" cy="212137"/>
             </a:xfrm>
             <a:prstGeom prst="roundRect">
               <a:avLst>
@@ -10607,27 +10325,20 @@
             </a:bodyPr>
             <a:lstStyle/>
             <a:p>
-              <a:pPr algn="ctr">
-                <a:defRPr>
-                  <a:latin typeface="+mn-lt"/>
-                  <a:ea typeface="+mn-ea"/>
-                  <a:cs typeface="+mn-cs"/>
-                  <a:sym typeface="Calibri"/>
-                </a:defRPr>
-              </a:pPr>
+              <a:pPr algn="ctr"/>
             </a:p>
           </p:txBody>
         </p:sp>
         <p:sp>
           <p:nvSpPr>
-            <p:cNvPr id="297" name="Phase 3"/>
+            <p:cNvPr id="296" name="Phase 3"/>
             <p:cNvSpPr txBox="1"/>
             <p:nvPr/>
           </p:nvSpPr>
           <p:spPr>
             <a:xfrm>
               <a:off x="56075" y="0"/>
-              <a:ext cx="3600707" cy="280799"/>
+              <a:ext cx="3600708" cy="280797"/>
             </a:xfrm>
             <a:prstGeom prst="rect">
               <a:avLst/>
@@ -10645,17 +10356,12 @@
             </a:extLst>
           </p:spPr>
           <p:txBody>
-            <a:bodyPr wrap="square" lIns="45719" tIns="45719" rIns="45719" bIns="45719" numCol="1" anchor="ctr">
+            <a:bodyPr wrap="square" lIns="45718" tIns="45718" rIns="45718" bIns="45718" numCol="1" anchor="ctr">
               <a:spAutoFit/>
             </a:bodyPr>
             <a:lstStyle>
               <a:lvl1pPr algn="ctr">
-                <a:defRPr b="1" sz="1400">
-                  <a:latin typeface="+mn-lt"/>
-                  <a:ea typeface="+mn-ea"/>
-                  <a:cs typeface="+mn-cs"/>
-                  <a:sym typeface="Calibri"/>
-                </a:defRPr>
+                <a:defRPr b="1" sz="1400"/>
               </a:lvl1pPr>
             </a:lstStyle>
             <a:p>
@@ -10669,14 +10375,14 @@
       </p:grpSp>
       <p:sp>
         <p:nvSpPr>
-          <p:cNvPr id="299" name="Left Brace 18"/>
+          <p:cNvPr id="298" name="Left Brace 18"/>
           <p:cNvSpPr/>
           <p:nvPr/>
         </p:nvSpPr>
         <p:spPr>
           <a:xfrm rot="16200000">
             <a:off x="891531" y="1369525"/>
-            <a:ext cx="82297" cy="731521"/>
+            <a:ext cx="82298" cy="731522"/>
           </a:xfrm>
           <a:custGeom>
             <a:avLst/>
@@ -10741,27 +10447,20 @@
           <a:bodyPr lIns="45718" tIns="45718" rIns="45718" bIns="45718" anchor="ctr"/>
           <a:lstStyle/>
           <a:p>
-            <a:pPr algn="ctr">
-              <a:defRPr>
-                <a:latin typeface="+mn-lt"/>
-                <a:ea typeface="+mn-ea"/>
-                <a:cs typeface="+mn-cs"/>
-                <a:sym typeface="Calibri"/>
-              </a:defRPr>
-            </a:pPr>
+            <a:pPr algn="ctr"/>
           </a:p>
         </p:txBody>
       </p:sp>
       <p:sp>
         <p:nvSpPr>
-          <p:cNvPr id="300" name="TextBox 19"/>
+          <p:cNvPr id="299" name="TextBox 19"/>
           <p:cNvSpPr txBox="1"/>
           <p:nvPr/>
         </p:nvSpPr>
         <p:spPr>
           <a:xfrm>
-            <a:off x="553202" y="1810119"/>
-            <a:ext cx="758953" cy="225709"/>
+            <a:off x="553201" y="1810119"/>
+            <a:ext cx="758954" cy="225707"/>
           </a:xfrm>
           <a:prstGeom prst="rect">
             <a:avLst/>
@@ -10776,17 +10475,12 @@
           </a:extLst>
         </p:spPr>
         <p:txBody>
-          <a:bodyPr lIns="45719" rIns="45719">
+          <a:bodyPr lIns="45718" tIns="45718" rIns="45718" bIns="45718">
             <a:spAutoFit/>
           </a:bodyPr>
           <a:lstStyle>
             <a:lvl1pPr>
-              <a:defRPr i="1" sz="1100">
-                <a:latin typeface="+mn-lt"/>
-                <a:ea typeface="+mn-ea"/>
-                <a:cs typeface="+mn-cs"/>
-                <a:sym typeface="Calibri"/>
-              </a:defRPr>
+              <a:defRPr i="1" sz="1100"/>
             </a:lvl1pPr>
           </a:lstStyle>
           <a:p>
@@ -10799,14 +10493,14 @@
       </p:sp>
       <p:sp>
         <p:nvSpPr>
-          <p:cNvPr id="301" name="TextBox 20"/>
+          <p:cNvPr id="300" name="TextBox 20"/>
           <p:cNvSpPr txBox="1"/>
           <p:nvPr/>
         </p:nvSpPr>
         <p:spPr>
           <a:xfrm>
             <a:off x="3012467" y="1164853"/>
-            <a:ext cx="758953" cy="225709"/>
+            <a:ext cx="758954" cy="225707"/>
           </a:xfrm>
           <a:prstGeom prst="rect">
             <a:avLst/>
@@ -10821,17 +10515,12 @@
           </a:extLst>
         </p:spPr>
         <p:txBody>
-          <a:bodyPr lIns="45719" rIns="45719">
+          <a:bodyPr lIns="45718" tIns="45718" rIns="45718" bIns="45718">
             <a:spAutoFit/>
           </a:bodyPr>
           <a:lstStyle>
             <a:lvl1pPr>
-              <a:defRPr i="1" sz="1100">
-                <a:latin typeface="+mn-lt"/>
-                <a:ea typeface="+mn-ea"/>
-                <a:cs typeface="+mn-cs"/>
-                <a:sym typeface="Calibri"/>
-              </a:defRPr>
+              <a:defRPr i="1" sz="1100"/>
             </a:lvl1pPr>
           </a:lstStyle>
           <a:p>
@@ -10844,14 +10533,14 @@
       </p:sp>
       <p:sp>
         <p:nvSpPr>
-          <p:cNvPr id="302" name="Left Brace 21"/>
+          <p:cNvPr id="301" name="Left Brace 21"/>
           <p:cNvSpPr/>
           <p:nvPr/>
         </p:nvSpPr>
         <p:spPr>
           <a:xfrm rot="5400000">
             <a:off x="3336118" y="-26144"/>
-            <a:ext cx="111649" cy="2994751"/>
+            <a:ext cx="111650" cy="2994751"/>
           </a:xfrm>
           <a:custGeom>
             <a:avLst/>
@@ -10916,41 +10605,34 @@
           <a:bodyPr lIns="45718" tIns="45718" rIns="45718" bIns="45718" anchor="ctr"/>
           <a:lstStyle/>
           <a:p>
-            <a:pPr algn="ctr">
-              <a:defRPr>
-                <a:latin typeface="+mn-lt"/>
-                <a:ea typeface="+mn-ea"/>
-                <a:cs typeface="+mn-cs"/>
-                <a:sym typeface="Calibri"/>
-              </a:defRPr>
-            </a:pPr>
+            <a:pPr algn="ctr"/>
           </a:p>
         </p:txBody>
       </p:sp>
       <p:grpSp>
         <p:nvGrpSpPr>
-          <p:cNvPr id="305" name="Right Arrow 22"/>
+          <p:cNvPr id="304" name="Right Arrow 22"/>
           <p:cNvGrpSpPr/>
           <p:nvPr/>
         </p:nvGrpSpPr>
         <p:grpSpPr>
           <a:xfrm>
             <a:off x="237727" y="118101"/>
-            <a:ext cx="8723393" cy="521109"/>
+            <a:ext cx="8723395" cy="521110"/>
             <a:chOff x="0" y="0"/>
-            <a:chExt cx="8723392" cy="521108"/>
+            <a:chExt cx="8723393" cy="521109"/>
           </a:xfrm>
         </p:grpSpPr>
         <p:sp>
           <p:nvSpPr>
-            <p:cNvPr id="303" name="Arrow"/>
+            <p:cNvPr id="302" name="Arrow"/>
             <p:cNvSpPr/>
             <p:nvPr/>
           </p:nvSpPr>
           <p:spPr>
             <a:xfrm>
               <a:off x="0" y="0"/>
-              <a:ext cx="8723393" cy="521109"/>
+              <a:ext cx="8723395" cy="521110"/>
             </a:xfrm>
             <a:prstGeom prst="rightArrow">
               <a:avLst>
@@ -10987,10 +10669,6 @@
                   <a:solidFill>
                     <a:srgbClr val="FFFFFF"/>
                   </a:solidFill>
-                  <a:latin typeface="+mn-lt"/>
-                  <a:ea typeface="+mn-ea"/>
-                  <a:cs typeface="+mn-cs"/>
-                  <a:sym typeface="Calibri"/>
                 </a:defRPr>
               </a:pPr>
             </a:p>
@@ -10998,14 +10676,14 @@
         </p:sp>
         <p:sp>
           <p:nvSpPr>
-            <p:cNvPr id="304" name="Project Roadmap"/>
+            <p:cNvPr id="303" name="Project Roadmap"/>
             <p:cNvSpPr txBox="1"/>
             <p:nvPr/>
           </p:nvSpPr>
           <p:spPr>
             <a:xfrm>
-              <a:off x="50482" y="94010"/>
-              <a:ext cx="8492151" cy="333088"/>
+              <a:off x="50481" y="94010"/>
+              <a:ext cx="8492154" cy="333086"/>
             </a:xfrm>
             <a:prstGeom prst="rect">
               <a:avLst/>
@@ -11023,7 +10701,7 @@
             </a:extLst>
           </p:spPr>
           <p:txBody>
-            <a:bodyPr wrap="square" lIns="45719" tIns="45719" rIns="45719" bIns="45719" numCol="1" anchor="ctr">
+            <a:bodyPr wrap="square" lIns="45718" tIns="45718" rIns="45718" bIns="45718" numCol="1" anchor="ctr">
               <a:spAutoFit/>
             </a:bodyPr>
             <a:lstStyle>
@@ -11032,10 +10710,6 @@
                   <a:solidFill>
                     <a:srgbClr val="FFFFFF"/>
                   </a:solidFill>
-                  <a:latin typeface="+mn-lt"/>
-                  <a:ea typeface="+mn-ea"/>
-                  <a:cs typeface="+mn-cs"/>
-                  <a:sym typeface="Calibri"/>
                 </a:defRPr>
               </a:lvl1pPr>
             </a:lstStyle>
@@ -11050,14 +10724,14 @@
       </p:grpSp>
       <p:sp>
         <p:nvSpPr>
-          <p:cNvPr id="306" name="Left Brace 23"/>
+          <p:cNvPr id="305" name="Left Brace 23"/>
           <p:cNvSpPr/>
           <p:nvPr/>
         </p:nvSpPr>
         <p:spPr>
           <a:xfrm flipH="1" rot="10800000">
             <a:off x="5027645" y="3680047"/>
-            <a:ext cx="146897" cy="492065"/>
+            <a:ext cx="146898" cy="492066"/>
           </a:xfrm>
           <a:custGeom>
             <a:avLst/>
@@ -11122,27 +10796,20 @@
           <a:bodyPr lIns="45718" tIns="45718" rIns="45718" bIns="45718" anchor="ctr"/>
           <a:lstStyle/>
           <a:p>
-            <a:pPr algn="ctr">
-              <a:defRPr>
-                <a:latin typeface="+mn-lt"/>
-                <a:ea typeface="+mn-ea"/>
-                <a:cs typeface="+mn-cs"/>
-                <a:sym typeface="Calibri"/>
-              </a:defRPr>
-            </a:pPr>
+            <a:pPr algn="ctr"/>
           </a:p>
         </p:txBody>
       </p:sp>
       <p:sp>
         <p:nvSpPr>
-          <p:cNvPr id="307" name="TextBox 26"/>
+          <p:cNvPr id="306" name="TextBox 26"/>
           <p:cNvSpPr txBox="1"/>
           <p:nvPr/>
         </p:nvSpPr>
         <p:spPr>
           <a:xfrm>
-            <a:off x="4619393" y="3795274"/>
-            <a:ext cx="339587" cy="225708"/>
+            <a:off x="4619392" y="3795275"/>
+            <a:ext cx="339588" cy="225707"/>
           </a:xfrm>
           <a:prstGeom prst="rect">
             <a:avLst/>
@@ -11157,17 +10824,12 @@
           </a:extLst>
         </p:spPr>
         <p:txBody>
-          <a:bodyPr lIns="45719" rIns="45719">
+          <a:bodyPr lIns="45718" tIns="45718" rIns="45718" bIns="45718">
             <a:spAutoFit/>
           </a:bodyPr>
           <a:lstStyle>
             <a:lvl1pPr>
-              <a:defRPr i="1" sz="1100">
-                <a:latin typeface="+mn-lt"/>
-                <a:ea typeface="+mn-ea"/>
-                <a:cs typeface="+mn-cs"/>
-                <a:sym typeface="Calibri"/>
-              </a:defRPr>
+              <a:defRPr i="1" sz="1100"/>
             </a:lvl1pPr>
           </a:lstStyle>
           <a:p>
@@ -11180,14 +10842,14 @@
       </p:sp>
       <p:sp>
         <p:nvSpPr>
-          <p:cNvPr id="308" name="Left Brace 27"/>
+          <p:cNvPr id="307" name="Left Brace 27"/>
           <p:cNvSpPr/>
           <p:nvPr/>
         </p:nvSpPr>
         <p:spPr>
           <a:xfrm flipH="1" rot="10800000">
             <a:off x="5072076" y="4326223"/>
-            <a:ext cx="102465" cy="1205716"/>
+            <a:ext cx="102466" cy="1205717"/>
           </a:xfrm>
           <a:custGeom>
             <a:avLst/>
@@ -11252,27 +10914,20 @@
           <a:bodyPr lIns="45718" tIns="45718" rIns="45718" bIns="45718" anchor="ctr"/>
           <a:lstStyle/>
           <a:p>
-            <a:pPr algn="ctr">
-              <a:defRPr>
-                <a:latin typeface="+mn-lt"/>
-                <a:ea typeface="+mn-ea"/>
-                <a:cs typeface="+mn-cs"/>
-                <a:sym typeface="Calibri"/>
-              </a:defRPr>
-            </a:pPr>
+            <a:pPr algn="ctr"/>
           </a:p>
         </p:txBody>
       </p:sp>
       <p:sp>
         <p:nvSpPr>
-          <p:cNvPr id="309" name="TextBox 28"/>
+          <p:cNvPr id="308" name="TextBox 28"/>
           <p:cNvSpPr txBox="1"/>
           <p:nvPr/>
         </p:nvSpPr>
         <p:spPr>
           <a:xfrm>
-            <a:off x="4617718" y="4798274"/>
-            <a:ext cx="361485" cy="225709"/>
+            <a:off x="4617718" y="4798275"/>
+            <a:ext cx="361486" cy="225707"/>
           </a:xfrm>
           <a:prstGeom prst="rect">
             <a:avLst/>
@@ -11287,17 +10942,12 @@
           </a:extLst>
         </p:spPr>
         <p:txBody>
-          <a:bodyPr lIns="45719" rIns="45719">
+          <a:bodyPr lIns="45718" tIns="45718" rIns="45718" bIns="45718">
             <a:spAutoFit/>
           </a:bodyPr>
           <a:lstStyle>
             <a:lvl1pPr>
-              <a:defRPr i="1" sz="1100">
-                <a:latin typeface="+mn-lt"/>
-                <a:ea typeface="+mn-ea"/>
-                <a:cs typeface="+mn-cs"/>
-                <a:sym typeface="Calibri"/>
-              </a:defRPr>
+              <a:defRPr i="1" sz="1100"/>
             </a:lvl1pPr>
           </a:lstStyle>
           <a:p>
@@ -11310,14 +10960,14 @@
       </p:sp>
       <p:sp>
         <p:nvSpPr>
-          <p:cNvPr id="310" name="Left Brace 29"/>
+          <p:cNvPr id="309" name="Left Brace 29"/>
           <p:cNvSpPr/>
           <p:nvPr/>
         </p:nvSpPr>
         <p:spPr>
           <a:xfrm flipH="1" rot="5400000">
-            <a:off x="6903858" y="4027563"/>
-            <a:ext cx="60429" cy="1064633"/>
+            <a:off x="6903857" y="4027563"/>
+            <a:ext cx="60430" cy="1064634"/>
           </a:xfrm>
           <a:custGeom>
             <a:avLst/>
@@ -11382,27 +11032,20 @@
           <a:bodyPr lIns="45718" tIns="45718" rIns="45718" bIns="45718" anchor="ctr"/>
           <a:lstStyle/>
           <a:p>
-            <a:pPr algn="ctr">
-              <a:defRPr>
-                <a:latin typeface="+mn-lt"/>
-                <a:ea typeface="+mn-ea"/>
-                <a:cs typeface="+mn-cs"/>
-                <a:sym typeface="Calibri"/>
-              </a:defRPr>
-            </a:pPr>
+            <a:pPr algn="ctr"/>
           </a:p>
         </p:txBody>
       </p:sp>
       <p:sp>
         <p:nvSpPr>
-          <p:cNvPr id="311" name="TextBox 30"/>
+          <p:cNvPr id="310" name="TextBox 30"/>
           <p:cNvSpPr txBox="1"/>
           <p:nvPr/>
         </p:nvSpPr>
         <p:spPr>
           <a:xfrm>
-            <a:off x="6733679" y="4590093"/>
-            <a:ext cx="361485" cy="225709"/>
+            <a:off x="6733678" y="4590094"/>
+            <a:ext cx="361486" cy="225707"/>
           </a:xfrm>
           <a:prstGeom prst="rect">
             <a:avLst/>
@@ -11417,17 +11060,12 @@
           </a:extLst>
         </p:spPr>
         <p:txBody>
-          <a:bodyPr lIns="45719" rIns="45719">
+          <a:bodyPr lIns="45718" tIns="45718" rIns="45718" bIns="45718">
             <a:spAutoFit/>
           </a:bodyPr>
           <a:lstStyle>
             <a:lvl1pPr>
-              <a:defRPr i="1" sz="1100">
-                <a:latin typeface="+mn-lt"/>
-                <a:ea typeface="+mn-ea"/>
-                <a:cs typeface="+mn-cs"/>
-                <a:sym typeface="Calibri"/>
-              </a:defRPr>
+              <a:defRPr i="1" sz="1100"/>
             </a:lvl1pPr>
           </a:lstStyle>
           <a:p>
@@ -11440,14 +11078,14 @@
       </p:sp>
       <p:sp>
         <p:nvSpPr>
-          <p:cNvPr id="312" name="Left Brace 31"/>
+          <p:cNvPr id="311" name="Left Brace 31"/>
           <p:cNvSpPr/>
           <p:nvPr/>
         </p:nvSpPr>
         <p:spPr>
           <a:xfrm flipH="1" rot="5400000">
             <a:off x="8233725" y="4529868"/>
-            <a:ext cx="124965" cy="1036017"/>
+            <a:ext cx="124966" cy="1036018"/>
           </a:xfrm>
           <a:custGeom>
             <a:avLst/>
@@ -11512,27 +11150,20 @@
           <a:bodyPr lIns="45718" tIns="45718" rIns="45718" bIns="45718" anchor="ctr"/>
           <a:lstStyle/>
           <a:p>
-            <a:pPr algn="ctr">
-              <a:defRPr>
-                <a:latin typeface="+mn-lt"/>
-                <a:ea typeface="+mn-ea"/>
-                <a:cs typeface="+mn-cs"/>
-                <a:sym typeface="Calibri"/>
-              </a:defRPr>
-            </a:pPr>
+            <a:pPr algn="ctr"/>
           </a:p>
         </p:txBody>
       </p:sp>
       <p:sp>
         <p:nvSpPr>
-          <p:cNvPr id="313" name="TextBox 32"/>
+          <p:cNvPr id="312" name="TextBox 32"/>
           <p:cNvSpPr txBox="1"/>
           <p:nvPr/>
         </p:nvSpPr>
         <p:spPr>
           <a:xfrm>
-            <a:off x="6852596" y="5660485"/>
-            <a:ext cx="339587" cy="225709"/>
+            <a:off x="6852595" y="5660486"/>
+            <a:ext cx="339588" cy="225707"/>
           </a:xfrm>
           <a:prstGeom prst="rect">
             <a:avLst/>
@@ -11547,17 +11178,12 @@
           </a:extLst>
         </p:spPr>
         <p:txBody>
-          <a:bodyPr lIns="45719" rIns="45719">
+          <a:bodyPr lIns="45718" tIns="45718" rIns="45718" bIns="45718">
             <a:spAutoFit/>
           </a:bodyPr>
           <a:lstStyle>
             <a:lvl1pPr>
-              <a:defRPr i="1" sz="1100">
-                <a:latin typeface="+mn-lt"/>
-                <a:ea typeface="+mn-ea"/>
-                <a:cs typeface="+mn-cs"/>
-                <a:sym typeface="Calibri"/>
-              </a:defRPr>
+              <a:defRPr i="1" sz="1100"/>
             </a:lvl1pPr>
           </a:lstStyle>
           <a:p>
@@ -11570,14 +11196,14 @@
       </p:sp>
       <p:sp>
         <p:nvSpPr>
-          <p:cNvPr id="314" name="TextBox 33"/>
+          <p:cNvPr id="313" name="TextBox 33"/>
           <p:cNvSpPr txBox="1"/>
           <p:nvPr/>
         </p:nvSpPr>
         <p:spPr>
           <a:xfrm>
-            <a:off x="7916731" y="5110358"/>
-            <a:ext cx="758953" cy="225709"/>
+            <a:off x="7916730" y="5110358"/>
+            <a:ext cx="758954" cy="225707"/>
           </a:xfrm>
           <a:prstGeom prst="rect">
             <a:avLst/>
@@ -11592,17 +11218,12 @@
           </a:extLst>
         </p:spPr>
         <p:txBody>
-          <a:bodyPr lIns="45719" rIns="45719">
+          <a:bodyPr lIns="45718" tIns="45718" rIns="45718" bIns="45718">
             <a:spAutoFit/>
           </a:bodyPr>
           <a:lstStyle>
             <a:lvl1pPr>
-              <a:defRPr i="1" sz="1100">
-                <a:latin typeface="+mn-lt"/>
-                <a:ea typeface="+mn-ea"/>
-                <a:cs typeface="+mn-cs"/>
-                <a:sym typeface="Calibri"/>
-              </a:defRPr>
+              <a:defRPr i="1" sz="1100"/>
             </a:lvl1pPr>
           </a:lstStyle>
           <a:p>
@@ -11615,14 +11236,14 @@
       </p:sp>
       <p:sp>
         <p:nvSpPr>
-          <p:cNvPr id="315" name="Left Brace 34"/>
+          <p:cNvPr id="314" name="Left Brace 34"/>
           <p:cNvSpPr/>
           <p:nvPr/>
         </p:nvSpPr>
         <p:spPr>
           <a:xfrm flipH="1" rot="5400000">
-            <a:off x="6983581" y="5083547"/>
-            <a:ext cx="77619" cy="1025330"/>
+            <a:off x="6983580" y="5083547"/>
+            <a:ext cx="77620" cy="1025331"/>
           </a:xfrm>
           <a:custGeom>
             <a:avLst/>
@@ -11687,26 +11308,19 @@
           <a:bodyPr lIns="45718" tIns="45718" rIns="45718" bIns="45718" anchor="ctr"/>
           <a:lstStyle/>
           <a:p>
-            <a:pPr algn="ctr">
-              <a:defRPr>
-                <a:latin typeface="+mn-lt"/>
-                <a:ea typeface="+mn-ea"/>
-                <a:cs typeface="+mn-cs"/>
-                <a:sym typeface="Calibri"/>
-              </a:defRPr>
-            </a:pPr>
+            <a:pPr algn="ctr"/>
           </a:p>
         </p:txBody>
       </p:sp>
       <p:graphicFrame>
         <p:nvGraphicFramePr>
-          <p:cNvPr id="316" name="Table 35"/>
+          <p:cNvPr id="315" name="Table 35"/>
           <p:cNvGraphicFramePr/>
           <p:nvPr/>
         </p:nvGraphicFramePr>
         <p:xfrm>
           <a:off x="237725" y="553870"/>
-          <a:ext cx="8723395" cy="370841"/>
+          <a:ext cx="8723395" cy="370842"/>
         </p:xfrm>
         <a:graphic xmlns:a="http://schemas.openxmlformats.org/drawingml/2006/main">
           <a:graphicData uri="http://schemas.openxmlformats.org/drawingml/2006/table">
@@ -11868,14 +11482,14 @@
       </p:graphicFrame>
       <p:sp>
         <p:nvSpPr>
-          <p:cNvPr id="317" name="Straight Connector 38"/>
+          <p:cNvPr id="316" name="Straight Connector 38"/>
           <p:cNvSpPr/>
           <p:nvPr/>
         </p:nvSpPr>
         <p:spPr>
           <a:xfrm flipH="1">
             <a:off x="6357325" y="553870"/>
-            <a:ext cx="1" cy="5266639"/>
+            <a:ext cx="1" cy="5266640"/>
           </a:xfrm>
           <a:prstGeom prst="line">
             <a:avLst/>
@@ -11897,14 +11511,14 @@
       </p:sp>
       <p:sp>
         <p:nvSpPr>
-          <p:cNvPr id="318" name="5-Point Star 40"/>
+          <p:cNvPr id="317" name="5-Point Star 40"/>
           <p:cNvSpPr/>
           <p:nvPr/>
         </p:nvSpPr>
         <p:spPr>
           <a:xfrm>
-            <a:off x="6237646" y="2719759"/>
-            <a:ext cx="239358" cy="212136"/>
+            <a:off x="6237646" y="2719758"/>
+            <a:ext cx="239358" cy="212138"/>
           </a:xfrm>
           <a:prstGeom prst="star5">
             <a:avLst>
@@ -11936,10 +11550,6 @@
                 <a:solidFill>
                   <a:srgbClr val="FFFFFF"/>
                 </a:solidFill>
-                <a:latin typeface="+mn-lt"/>
-                <a:ea typeface="+mn-ea"/>
-                <a:cs typeface="+mn-cs"/>
-                <a:sym typeface="Calibri"/>
               </a:defRPr>
             </a:pPr>
           </a:p>
@@ -12209,10 +11819,10 @@
             </a:solidFill>
             <a:effectLst/>
             <a:uFillTx/>
-            <a:latin typeface="+mj-lt"/>
-            <a:ea typeface="+mj-ea"/>
-            <a:cs typeface="+mj-cs"/>
-            <a:sym typeface="Helvetica"/>
+            <a:latin typeface="+mn-lt"/>
+            <a:ea typeface="+mn-ea"/>
+            <a:cs typeface="+mn-cs"/>
+            <a:sym typeface="Calibri"/>
           </a:defRPr>
         </a:defPPr>
         <a:lvl1pPr marL="0" marR="0" indent="0" algn="l" defTabSz="914400" rtl="0" fontAlgn="auto" latinLnBrk="1" hangingPunct="0">
@@ -12786,10 +12396,10 @@
             </a:solidFill>
             <a:effectLst/>
             <a:uFillTx/>
-            <a:latin typeface="+mj-lt"/>
-            <a:ea typeface="+mj-ea"/>
-            <a:cs typeface="+mj-cs"/>
-            <a:sym typeface="Helvetica"/>
+            <a:latin typeface="+mn-lt"/>
+            <a:ea typeface="+mn-ea"/>
+            <a:cs typeface="+mn-cs"/>
+            <a:sym typeface="Calibri"/>
           </a:defRPr>
         </a:defPPr>
         <a:lvl1pPr marL="0" marR="0" indent="0" algn="l" defTabSz="914400" rtl="0" fontAlgn="auto" latinLnBrk="1" hangingPunct="0">
@@ -13293,10 +12903,10 @@
             </a:solidFill>
             <a:effectLst/>
             <a:uFillTx/>
-            <a:latin typeface="+mj-lt"/>
-            <a:ea typeface="+mj-ea"/>
-            <a:cs typeface="+mj-cs"/>
-            <a:sym typeface="Helvetica"/>
+            <a:latin typeface="+mn-lt"/>
+            <a:ea typeface="+mn-ea"/>
+            <a:cs typeface="+mn-cs"/>
+            <a:sym typeface="Calibri"/>
           </a:defRPr>
         </a:defPPr>
         <a:lvl1pPr marL="0" marR="0" indent="0" algn="l" defTabSz="914400" rtl="0" fontAlgn="auto" latinLnBrk="1" hangingPunct="0">
@@ -13870,10 +13480,10 @@
             </a:solidFill>
             <a:effectLst/>
             <a:uFillTx/>
-            <a:latin typeface="+mj-lt"/>
-            <a:ea typeface="+mj-ea"/>
-            <a:cs typeface="+mj-cs"/>
-            <a:sym typeface="Helvetica"/>
+            <a:latin typeface="+mn-lt"/>
+            <a:ea typeface="+mn-ea"/>
+            <a:cs typeface="+mn-cs"/>
+            <a:sym typeface="Calibri"/>
           </a:defRPr>
         </a:defPPr>
         <a:lvl1pPr marL="0" marR="0" indent="0" algn="l" defTabSz="914400" rtl="0" fontAlgn="auto" latinLnBrk="1" hangingPunct="0">
